--- a/PPTs/Lecture 8 - Exercises ANS.pptx
+++ b/PPTs/Lecture 8 - Exercises ANS.pptx
@@ -5,36 +5,38 @@
     <p:sldMasterId id="2147483670" r:id="rId1"/>
   </p:sldMasterIdLst>
   <p:notesMasterIdLst>
-    <p:notesMasterId r:id="rId5"/>
+    <p:notesMasterId r:id="rId7"/>
   </p:notesMasterIdLst>
   <p:sldIdLst>
     <p:sldId id="256" r:id="rId2"/>
     <p:sldId id="285" r:id="rId3"/>
     <p:sldId id="286" r:id="rId4"/>
+    <p:sldId id="287" r:id="rId5"/>
+    <p:sldId id="288" r:id="rId6"/>
   </p:sldIdLst>
   <p:sldSz cx="9144000" cy="5143500" type="screen16x9"/>
   <p:notesSz cx="6858000" cy="9144000"/>
   <p:embeddedFontLst>
     <p:embeddedFont>
       <p:font typeface="Roboto" panose="02000000000000000000" pitchFamily="2" charset="0"/>
-      <p:regular r:id="rId6"/>
-      <p:bold r:id="rId7"/>
-      <p:italic r:id="rId8"/>
-      <p:boldItalic r:id="rId9"/>
+      <p:regular r:id="rId8"/>
+      <p:bold r:id="rId9"/>
+      <p:italic r:id="rId10"/>
+      <p:boldItalic r:id="rId11"/>
     </p:embeddedFont>
     <p:embeddedFont>
       <p:font typeface="Roboto Light" panose="02000000000000000000" pitchFamily="2" charset="0"/>
-      <p:regular r:id="rId10"/>
-      <p:bold r:id="rId11"/>
-      <p:italic r:id="rId12"/>
-      <p:boldItalic r:id="rId13"/>
+      <p:regular r:id="rId12"/>
+      <p:bold r:id="rId13"/>
+      <p:italic r:id="rId14"/>
+      <p:boldItalic r:id="rId15"/>
     </p:embeddedFont>
     <p:embeddedFont>
       <p:font typeface="Roboto Medium" panose="02000000000000000000" pitchFamily="2" charset="0"/>
-      <p:regular r:id="rId14"/>
-      <p:bold r:id="rId15"/>
-      <p:italic r:id="rId16"/>
-      <p:boldItalic r:id="rId17"/>
+      <p:regular r:id="rId16"/>
+      <p:bold r:id="rId17"/>
+      <p:italic r:id="rId18"/>
+      <p:boldItalic r:id="rId19"/>
     </p:embeddedFont>
   </p:embeddedFontLst>
   <p:defaultTextStyle>
@@ -16541,10 +16543,621 @@
           </a:prstGeom>
         </p:spPr>
       </p:pic>
+      <p:sp>
+        <p:nvSpPr>
+          <p:cNvPr id="3" name="TextBox 2">
+            <a:extLst>
+              <a:ext uri="{FF2B5EF4-FFF2-40B4-BE49-F238E27FC236}">
+                <a16:creationId xmlns:a16="http://schemas.microsoft.com/office/drawing/2014/main" id="{47247A74-E8E4-1678-ACB8-F868F0268B9C}"/>
+              </a:ext>
+            </a:extLst>
+          </p:cNvPr>
+          <p:cNvSpPr txBox="1"/>
+          <p:nvPr/>
+        </p:nvSpPr>
+        <p:spPr>
+          <a:xfrm>
+            <a:off x="2490438" y="3519633"/>
+            <a:ext cx="795411" cy="261610"/>
+          </a:xfrm>
+          <a:prstGeom prst="rect">
+            <a:avLst/>
+          </a:prstGeom>
+          <a:noFill/>
+        </p:spPr>
+        <p:txBody>
+          <a:bodyPr wrap="none" rtlCol="0">
+            <a:spAutoFit/>
+          </a:bodyPr>
+          <a:lstStyle/>
+          <a:p>
+            <a:r>
+              <a:rPr lang="en-US" altLang="zh-CN" sz="1100" dirty="0"/>
+              <a:t>Customer</a:t>
+            </a:r>
+            <a:endParaRPr lang="zh-CN" altLang="en-US" sz="1100" dirty="0"/>
+          </a:p>
+        </p:txBody>
+      </p:sp>
+      <p:sp>
+        <p:nvSpPr>
+          <p:cNvPr id="5" name="TextBox 4">
+            <a:extLst>
+              <a:ext uri="{FF2B5EF4-FFF2-40B4-BE49-F238E27FC236}">
+                <a16:creationId xmlns:a16="http://schemas.microsoft.com/office/drawing/2014/main" id="{5EF2954B-D2E1-7F2D-3931-E831FC69A734}"/>
+              </a:ext>
+            </a:extLst>
+          </p:cNvPr>
+          <p:cNvSpPr txBox="1"/>
+          <p:nvPr/>
+        </p:nvSpPr>
+        <p:spPr>
+          <a:xfrm>
+            <a:off x="4367729" y="2775437"/>
+            <a:ext cx="482824" cy="261610"/>
+          </a:xfrm>
+          <a:prstGeom prst="rect">
+            <a:avLst/>
+          </a:prstGeom>
+          <a:noFill/>
+        </p:spPr>
+        <p:txBody>
+          <a:bodyPr wrap="none" rtlCol="0">
+            <a:spAutoFit/>
+          </a:bodyPr>
+          <a:lstStyle/>
+          <a:p>
+            <a:r>
+              <a:rPr lang="en-US" altLang="zh-CN" sz="1100" dirty="0"/>
+              <a:t>Peer</a:t>
+            </a:r>
+            <a:endParaRPr lang="zh-CN" altLang="en-US" sz="1100" dirty="0"/>
+          </a:p>
+        </p:txBody>
+      </p:sp>
     </p:spTree>
     <p:extLst>
       <p:ext uri="{BB962C8B-B14F-4D97-AF65-F5344CB8AC3E}">
         <p14:creationId xmlns:p14="http://schemas.microsoft.com/office/powerpoint/2010/main" val="20097595"/>
+      </p:ext>
+    </p:extLst>
+  </p:cSld>
+  <p:clrMapOvr>
+    <a:masterClrMapping/>
+  </p:clrMapOvr>
+</p:sld>
+</file>
+
+<file path=ppt/slides/slide4.xml><?xml version="1.0" encoding="utf-8"?>
+<p:sld xmlns:a="http://schemas.openxmlformats.org/drawingml/2006/main" xmlns:r="http://schemas.openxmlformats.org/officeDocument/2006/relationships" xmlns:p="http://schemas.openxmlformats.org/presentationml/2006/main">
+  <p:cSld>
+    <p:spTree>
+      <p:nvGrpSpPr>
+        <p:cNvPr id="1" name=""/>
+        <p:cNvGrpSpPr/>
+        <p:nvPr/>
+      </p:nvGrpSpPr>
+      <p:grpSpPr>
+        <a:xfrm>
+          <a:off x="0" y="0"/>
+          <a:ext cx="0" cy="0"/>
+          <a:chOff x="0" y="0"/>
+          <a:chExt cx="0" cy="0"/>
+        </a:xfrm>
+      </p:grpSpPr>
+      <p:sp>
+        <p:nvSpPr>
+          <p:cNvPr id="2" name="Title 1">
+            <a:extLst>
+              <a:ext uri="{FF2B5EF4-FFF2-40B4-BE49-F238E27FC236}">
+                <a16:creationId xmlns:a16="http://schemas.microsoft.com/office/drawing/2014/main" id="{EB247837-37E5-0024-8F58-B324FB7B590D}"/>
+              </a:ext>
+            </a:extLst>
+          </p:cNvPr>
+          <p:cNvSpPr>
+            <a:spLocks noGrp="1"/>
+          </p:cNvSpPr>
+          <p:nvPr>
+            <p:ph type="title"/>
+          </p:nvPr>
+        </p:nvSpPr>
+        <p:spPr/>
+        <p:txBody>
+          <a:bodyPr/>
+          <a:lstStyle/>
+          <a:p>
+            <a:r>
+              <a:rPr lang="en-US" altLang="zh-CN" dirty="0"/>
+              <a:t>Explanations</a:t>
+            </a:r>
+            <a:endParaRPr lang="zh-CN" altLang="en-US" dirty="0"/>
+          </a:p>
+        </p:txBody>
+      </p:sp>
+      <p:sp>
+        <p:nvSpPr>
+          <p:cNvPr id="3" name="Text Placeholder 2">
+            <a:extLst>
+              <a:ext uri="{FF2B5EF4-FFF2-40B4-BE49-F238E27FC236}">
+                <a16:creationId xmlns:a16="http://schemas.microsoft.com/office/drawing/2014/main" id="{3EF2E7EA-408D-6358-0351-525885CB7288}"/>
+              </a:ext>
+            </a:extLst>
+          </p:cNvPr>
+          <p:cNvSpPr>
+            <a:spLocks noGrp="1"/>
+          </p:cNvSpPr>
+          <p:nvPr>
+            <p:ph type="body" idx="1"/>
+          </p:nvPr>
+        </p:nvSpPr>
+        <p:spPr>
+          <a:xfrm>
+            <a:off x="107051" y="402200"/>
+            <a:ext cx="4880586" cy="4530600"/>
+          </a:xfrm>
+        </p:spPr>
+        <p:txBody>
+          <a:bodyPr/>
+          <a:lstStyle/>
+          <a:p>
+            <a:r>
+              <a:rPr lang="en-US" altLang="zh-CN" sz="1100" dirty="0"/>
+              <a:t>1) AS4 → AS2 → AS3 → AS5.This path respects all Gao-Rexford rules:</a:t>
+            </a:r>
+          </a:p>
+          <a:p>
+            <a:pPr lvl="1"/>
+            <a:r>
+              <a:rPr lang="en-US" altLang="zh-CN" sz="1100" dirty="0"/>
+              <a:t>AS4 has a customer neighbor (AS2 will accept)</a:t>
+            </a:r>
+          </a:p>
+          <a:p>
+            <a:pPr lvl="1"/>
+            <a:r>
+              <a:rPr lang="en-US" altLang="zh-CN" sz="1100" dirty="0"/>
+              <a:t>AS2 has a peer neighbor (AS3) AND a customer neighbor (AS5 paying AS3)</a:t>
+            </a:r>
+          </a:p>
+          <a:p>
+            <a:pPr lvl="1"/>
+            <a:r>
+              <a:rPr lang="en-US" altLang="zh-CN" sz="1100" dirty="0"/>
+              <a:t>AS3 has a customer neighbor (AS5 paying)</a:t>
+            </a:r>
+          </a:p>
+          <a:p>
+            <a:pPr lvl="1"/>
+            <a:r>
+              <a:rPr lang="en-US" altLang="zh-CN" sz="1100" dirty="0"/>
+              <a:t>Path is valley-free (no going up after going down)</a:t>
+            </a:r>
+          </a:p>
+          <a:p>
+            <a:r>
+              <a:rPr lang="en-US" altLang="zh-CN" sz="1100" dirty="0"/>
+              <a:t>2)</a:t>
+            </a:r>
+            <a:r>
+              <a:rPr lang="zh-CN" altLang="en-US" sz="1100" dirty="0"/>
+              <a:t> </a:t>
+            </a:r>
+            <a:r>
+              <a:rPr lang="en-US" altLang="zh-CN" sz="1100" dirty="0"/>
+              <a:t>AS6 → AS1 → AS7 → AS8 → AS5. Since AS2 won’t advertise its peer’s (AS3′s) path (about how to reach AS5) to its provider (AS1), so AS1 doesn’t know it can reach AS5 through AS2.</a:t>
+            </a:r>
+          </a:p>
+          <a:p>
+            <a:pPr lvl="1"/>
+            <a:r>
+              <a:rPr lang="en-US" altLang="zh-CN" sz="1100" dirty="0"/>
+              <a:t>Export policy: AS2 receives a route from peer AS3 (about reaching AS5)</a:t>
+            </a:r>
+          </a:p>
+          <a:p>
+            <a:pPr lvl="1"/>
+            <a:r>
+              <a:rPr lang="en-US" altLang="zh-CN" sz="1100" dirty="0"/>
+              <a:t>Export rule: Routes from peers are only advertised to customers (not to providers)</a:t>
+            </a:r>
+          </a:p>
+          <a:p>
+            <a:pPr lvl="1"/>
+            <a:r>
+              <a:rPr lang="en-US" altLang="zh-CN" sz="1100" dirty="0"/>
+              <a:t>Therefore: AS1 (AS2's provider) does NOT learn about the AS3→AS5 path</a:t>
+            </a:r>
+          </a:p>
+          <a:p>
+            <a:pPr lvl="1"/>
+            <a:r>
+              <a:rPr lang="en-US" altLang="zh-CN" sz="1100" dirty="0"/>
+              <a:t>So AS1 can only reach AS5 via AS7 (its peer) and then AS8→AS5</a:t>
+            </a:r>
+          </a:p>
+          <a:p>
+            <a:pPr lvl="1"/>
+            <a:r>
+              <a:rPr lang="en-US" altLang="zh-CN" sz="1100" dirty="0"/>
+              <a:t>This forces the long path through Tier 1 providers </a:t>
+            </a:r>
+            <a:endParaRPr lang="zh-CN" altLang="en-US" sz="1100" dirty="0"/>
+          </a:p>
+        </p:txBody>
+      </p:sp>
+      <p:pic>
+        <p:nvPicPr>
+          <p:cNvPr id="4" name="Picture 3">
+            <a:extLst>
+              <a:ext uri="{FF2B5EF4-FFF2-40B4-BE49-F238E27FC236}">
+                <a16:creationId xmlns:a16="http://schemas.microsoft.com/office/drawing/2014/main" id="{949A6015-9964-98A9-BB79-F44DEA81E950}"/>
+              </a:ext>
+            </a:extLst>
+          </p:cNvPr>
+          <p:cNvPicPr>
+            <a:picLocks noChangeAspect="1"/>
+          </p:cNvPicPr>
+          <p:nvPr/>
+        </p:nvPicPr>
+        <p:blipFill>
+          <a:blip r:embed="rId2"/>
+          <a:stretch>
+            <a:fillRect/>
+          </a:stretch>
+        </p:blipFill>
+        <p:spPr>
+          <a:xfrm>
+            <a:off x="4873227" y="1548938"/>
+            <a:ext cx="4270773" cy="2394982"/>
+          </a:xfrm>
+          <a:prstGeom prst="rect">
+            <a:avLst/>
+          </a:prstGeom>
+        </p:spPr>
+      </p:pic>
+      <p:sp>
+        <p:nvSpPr>
+          <p:cNvPr id="5" name="TextBox 4">
+            <a:extLst>
+              <a:ext uri="{FF2B5EF4-FFF2-40B4-BE49-F238E27FC236}">
+                <a16:creationId xmlns:a16="http://schemas.microsoft.com/office/drawing/2014/main" id="{80E020F4-2F1D-CE9F-2A67-F6EF1C4C48DC}"/>
+              </a:ext>
+            </a:extLst>
+          </p:cNvPr>
+          <p:cNvSpPr txBox="1"/>
+          <p:nvPr/>
+        </p:nvSpPr>
+        <p:spPr>
+          <a:xfrm>
+            <a:off x="4873227" y="2425124"/>
+            <a:ext cx="795411" cy="261610"/>
+          </a:xfrm>
+          <a:prstGeom prst="rect">
+            <a:avLst/>
+          </a:prstGeom>
+          <a:noFill/>
+        </p:spPr>
+        <p:txBody>
+          <a:bodyPr wrap="none" rtlCol="0">
+            <a:spAutoFit/>
+          </a:bodyPr>
+          <a:lstStyle/>
+          <a:p>
+            <a:r>
+              <a:rPr lang="en-US" altLang="zh-CN" sz="1100" dirty="0"/>
+              <a:t>Customer</a:t>
+            </a:r>
+            <a:endParaRPr lang="zh-CN" altLang="en-US" sz="1100" dirty="0"/>
+          </a:p>
+        </p:txBody>
+      </p:sp>
+      <p:sp>
+        <p:nvSpPr>
+          <p:cNvPr id="6" name="TextBox 5">
+            <a:extLst>
+              <a:ext uri="{FF2B5EF4-FFF2-40B4-BE49-F238E27FC236}">
+                <a16:creationId xmlns:a16="http://schemas.microsoft.com/office/drawing/2014/main" id="{2F581A5B-4594-D64C-190B-506610CF6467}"/>
+              </a:ext>
+            </a:extLst>
+          </p:cNvPr>
+          <p:cNvSpPr txBox="1"/>
+          <p:nvPr/>
+        </p:nvSpPr>
+        <p:spPr>
+          <a:xfrm>
+            <a:off x="6750518" y="1680928"/>
+            <a:ext cx="482824" cy="261610"/>
+          </a:xfrm>
+          <a:prstGeom prst="rect">
+            <a:avLst/>
+          </a:prstGeom>
+          <a:noFill/>
+        </p:spPr>
+        <p:txBody>
+          <a:bodyPr wrap="none" rtlCol="0">
+            <a:spAutoFit/>
+          </a:bodyPr>
+          <a:lstStyle/>
+          <a:p>
+            <a:r>
+              <a:rPr lang="en-US" altLang="zh-CN" sz="1100" dirty="0"/>
+              <a:t>Peer</a:t>
+            </a:r>
+            <a:endParaRPr lang="zh-CN" altLang="en-US" sz="1100" dirty="0"/>
+          </a:p>
+        </p:txBody>
+      </p:sp>
+    </p:spTree>
+    <p:extLst>
+      <p:ext uri="{BB962C8B-B14F-4D97-AF65-F5344CB8AC3E}">
+        <p14:creationId xmlns:p14="http://schemas.microsoft.com/office/powerpoint/2010/main" val="2594749675"/>
+      </p:ext>
+    </p:extLst>
+  </p:cSld>
+  <p:clrMapOvr>
+    <a:masterClrMapping/>
+  </p:clrMapOvr>
+</p:sld>
+</file>
+
+<file path=ppt/slides/slide5.xml><?xml version="1.0" encoding="utf-8"?>
+<p:sld xmlns:a="http://schemas.openxmlformats.org/drawingml/2006/main" xmlns:r="http://schemas.openxmlformats.org/officeDocument/2006/relationships" xmlns:p="http://schemas.openxmlformats.org/presentationml/2006/main">
+  <p:cSld>
+    <p:spTree>
+      <p:nvGrpSpPr>
+        <p:cNvPr id="1" name="">
+          <a:extLst>
+            <a:ext uri="{FF2B5EF4-FFF2-40B4-BE49-F238E27FC236}">
+              <a16:creationId xmlns:a16="http://schemas.microsoft.com/office/drawing/2014/main" id="{18FC069B-142B-1B32-5FC6-3A2B667E6FFF}"/>
+            </a:ext>
+          </a:extLst>
+        </p:cNvPr>
+        <p:cNvGrpSpPr/>
+        <p:nvPr/>
+      </p:nvGrpSpPr>
+      <p:grpSpPr>
+        <a:xfrm>
+          <a:off x="0" y="0"/>
+          <a:ext cx="0" cy="0"/>
+          <a:chOff x="0" y="0"/>
+          <a:chExt cx="0" cy="0"/>
+        </a:xfrm>
+      </p:grpSpPr>
+      <p:sp>
+        <p:nvSpPr>
+          <p:cNvPr id="2" name="Title 1">
+            <a:extLst>
+              <a:ext uri="{FF2B5EF4-FFF2-40B4-BE49-F238E27FC236}">
+                <a16:creationId xmlns:a16="http://schemas.microsoft.com/office/drawing/2014/main" id="{86E1E8E3-198B-0104-CACF-8A198A9913D8}"/>
+              </a:ext>
+            </a:extLst>
+          </p:cNvPr>
+          <p:cNvSpPr>
+            <a:spLocks noGrp="1"/>
+          </p:cNvSpPr>
+          <p:nvPr>
+            <p:ph type="title"/>
+          </p:nvPr>
+        </p:nvSpPr>
+        <p:spPr/>
+        <p:txBody>
+          <a:bodyPr/>
+          <a:lstStyle/>
+          <a:p>
+            <a:r>
+              <a:rPr lang="en-US" altLang="zh-CN" dirty="0"/>
+              <a:t>Explanations</a:t>
+            </a:r>
+            <a:endParaRPr lang="zh-CN" altLang="en-US" dirty="0"/>
+          </a:p>
+        </p:txBody>
+      </p:sp>
+      <p:sp>
+        <p:nvSpPr>
+          <p:cNvPr id="3" name="Text Placeholder 2">
+            <a:extLst>
+              <a:ext uri="{FF2B5EF4-FFF2-40B4-BE49-F238E27FC236}">
+                <a16:creationId xmlns:a16="http://schemas.microsoft.com/office/drawing/2014/main" id="{F212E2C6-E12E-3AF5-66F3-4A51DE722093}"/>
+              </a:ext>
+            </a:extLst>
+          </p:cNvPr>
+          <p:cNvSpPr>
+            <a:spLocks noGrp="1"/>
+          </p:cNvSpPr>
+          <p:nvPr>
+            <p:ph type="body" idx="1"/>
+          </p:nvPr>
+        </p:nvSpPr>
+        <p:spPr>
+          <a:xfrm>
+            <a:off x="107051" y="402200"/>
+            <a:ext cx="4818240" cy="4530600"/>
+          </a:xfrm>
+        </p:spPr>
+        <p:txBody>
+          <a:bodyPr/>
+          <a:lstStyle/>
+          <a:p>
+            <a:r>
+              <a:rPr lang="en-US" altLang="zh-CN" sz="1100" dirty="0"/>
+              <a:t>3) AS1 → AS7 → AS8 → AS9.This path respects all Gao-Rexford rules:</a:t>
+            </a:r>
+          </a:p>
+          <a:p>
+            <a:pPr lvl="1"/>
+            <a:r>
+              <a:rPr lang="en-US" altLang="zh-CN" sz="1100" dirty="0"/>
+              <a:t>AS1 is a Tier 1 AS (no providers)</a:t>
+            </a:r>
+          </a:p>
+          <a:p>
+            <a:pPr lvl="1"/>
+            <a:r>
+              <a:rPr lang="en-US" altLang="zh-CN" sz="1100" dirty="0"/>
+              <a:t>AS7 is also a Tier 1 AS (peering with AS1)</a:t>
+            </a:r>
+          </a:p>
+          <a:p>
+            <a:pPr lvl="1"/>
+            <a:r>
+              <a:rPr lang="en-US" altLang="zh-CN" sz="1100" dirty="0"/>
+              <a:t>To reach AS9, AS1 needs a path advertised by AS7</a:t>
+            </a:r>
+          </a:p>
+          <a:p>
+            <a:pPr lvl="1"/>
+            <a:r>
+              <a:rPr lang="en-US" altLang="zh-CN" sz="1100" dirty="0"/>
+              <a:t>AS7 receives routes from customers (AS8) and peers (AS1)</a:t>
+            </a:r>
+          </a:p>
+          <a:p>
+            <a:pPr lvl="1"/>
+            <a:r>
+              <a:rPr lang="en-US" altLang="zh-CN" sz="1100" dirty="0"/>
+              <a:t>Export rule: AS7 advertises customer routes (AS8's path) to all </a:t>
+            </a:r>
+            <a:r>
+              <a:rPr lang="en-US" altLang="zh-CN" sz="1100" dirty="0" err="1"/>
+              <a:t>ASes</a:t>
+            </a:r>
+            <a:endParaRPr lang="en-US" altLang="zh-CN" sz="1100" dirty="0"/>
+          </a:p>
+          <a:p>
+            <a:pPr lvl="1"/>
+            <a:r>
+              <a:rPr lang="en-US" altLang="zh-CN" sz="1100" dirty="0"/>
+              <a:t>So AS1 can use: AS1 → AS7 → AS8 → AS9</a:t>
+            </a:r>
+          </a:p>
+          <a:p>
+            <a:r>
+              <a:rPr lang="en-US" altLang="zh-CN" sz="1100" dirty="0"/>
+              <a:t>The principle is the same (export policies hide certain paths), but the mechanics are slightly different. Comparison:</a:t>
+            </a:r>
+          </a:p>
+          <a:p>
+            <a:pPr lvl="1"/>
+            <a:r>
+              <a:rPr lang="en-US" altLang="zh-CN" sz="1100" dirty="0"/>
+              <a:t>Part 2: AS1 tries to reach AS5 through AS2 (but AS2 hides the peer path)</a:t>
+            </a:r>
+          </a:p>
+          <a:p>
+            <a:pPr lvl="1"/>
+            <a:r>
+              <a:rPr lang="en-US" altLang="zh-CN" sz="1100" dirty="0"/>
+              <a:t>Part 3: AS1 tries to reach AS9 through AS7 (which advertises its customer's route)</a:t>
+            </a:r>
+          </a:p>
+        </p:txBody>
+      </p:sp>
+      <p:pic>
+        <p:nvPicPr>
+          <p:cNvPr id="4" name="Picture 3">
+            <a:extLst>
+              <a:ext uri="{FF2B5EF4-FFF2-40B4-BE49-F238E27FC236}">
+                <a16:creationId xmlns:a16="http://schemas.microsoft.com/office/drawing/2014/main" id="{A1A2DE1E-60E0-D49E-1FB2-2D7478DBC206}"/>
+              </a:ext>
+            </a:extLst>
+          </p:cNvPr>
+          <p:cNvPicPr>
+            <a:picLocks noChangeAspect="1"/>
+          </p:cNvPicPr>
+          <p:nvPr/>
+        </p:nvPicPr>
+        <p:blipFill>
+          <a:blip r:embed="rId2"/>
+          <a:stretch>
+            <a:fillRect/>
+          </a:stretch>
+        </p:blipFill>
+        <p:spPr>
+          <a:xfrm>
+            <a:off x="4873227" y="1548938"/>
+            <a:ext cx="4270773" cy="2394982"/>
+          </a:xfrm>
+          <a:prstGeom prst="rect">
+            <a:avLst/>
+          </a:prstGeom>
+        </p:spPr>
+      </p:pic>
+      <p:sp>
+        <p:nvSpPr>
+          <p:cNvPr id="5" name="TextBox 4">
+            <a:extLst>
+              <a:ext uri="{FF2B5EF4-FFF2-40B4-BE49-F238E27FC236}">
+                <a16:creationId xmlns:a16="http://schemas.microsoft.com/office/drawing/2014/main" id="{21B5C1E3-CCD1-9199-C7D8-D70DD7A2A619}"/>
+              </a:ext>
+            </a:extLst>
+          </p:cNvPr>
+          <p:cNvSpPr txBox="1"/>
+          <p:nvPr/>
+        </p:nvSpPr>
+        <p:spPr>
+          <a:xfrm>
+            <a:off x="4873227" y="2425124"/>
+            <a:ext cx="795411" cy="261610"/>
+          </a:xfrm>
+          <a:prstGeom prst="rect">
+            <a:avLst/>
+          </a:prstGeom>
+          <a:noFill/>
+        </p:spPr>
+        <p:txBody>
+          <a:bodyPr wrap="none" rtlCol="0">
+            <a:spAutoFit/>
+          </a:bodyPr>
+          <a:lstStyle/>
+          <a:p>
+            <a:r>
+              <a:rPr lang="en-US" altLang="zh-CN" sz="1100" dirty="0"/>
+              <a:t>Customer</a:t>
+            </a:r>
+            <a:endParaRPr lang="zh-CN" altLang="en-US" sz="1100" dirty="0"/>
+          </a:p>
+        </p:txBody>
+      </p:sp>
+      <p:sp>
+        <p:nvSpPr>
+          <p:cNvPr id="6" name="TextBox 5">
+            <a:extLst>
+              <a:ext uri="{FF2B5EF4-FFF2-40B4-BE49-F238E27FC236}">
+                <a16:creationId xmlns:a16="http://schemas.microsoft.com/office/drawing/2014/main" id="{DACA04F6-5FDF-C665-E024-661AC605DEC0}"/>
+              </a:ext>
+            </a:extLst>
+          </p:cNvPr>
+          <p:cNvSpPr txBox="1"/>
+          <p:nvPr/>
+        </p:nvSpPr>
+        <p:spPr>
+          <a:xfrm>
+            <a:off x="6750518" y="1680928"/>
+            <a:ext cx="482824" cy="261610"/>
+          </a:xfrm>
+          <a:prstGeom prst="rect">
+            <a:avLst/>
+          </a:prstGeom>
+          <a:noFill/>
+        </p:spPr>
+        <p:txBody>
+          <a:bodyPr wrap="none" rtlCol="0">
+            <a:spAutoFit/>
+          </a:bodyPr>
+          <a:lstStyle/>
+          <a:p>
+            <a:r>
+              <a:rPr lang="en-US" altLang="zh-CN" sz="1100" dirty="0"/>
+              <a:t>Peer</a:t>
+            </a:r>
+            <a:endParaRPr lang="zh-CN" altLang="en-US" sz="1100" dirty="0"/>
+          </a:p>
+        </p:txBody>
+      </p:sp>
+    </p:spTree>
+    <p:extLst>
+      <p:ext uri="{BB962C8B-B14F-4D97-AF65-F5344CB8AC3E}">
+        <p14:creationId xmlns:p14="http://schemas.microsoft.com/office/powerpoint/2010/main" val="1178719196"/>
       </p:ext>
     </p:extLst>
   </p:cSld>

--- a/PPTs/Lecture 8 - Exercises ANS.pptx
+++ b/PPTs/Lecture 8 - Exercises ANS.pptx
@@ -5,38 +5,39 @@
     <p:sldMasterId id="2147483670" r:id="rId1"/>
   </p:sldMasterIdLst>
   <p:notesMasterIdLst>
-    <p:notesMasterId r:id="rId7"/>
+    <p:notesMasterId r:id="rId8"/>
   </p:notesMasterIdLst>
   <p:sldIdLst>
     <p:sldId id="256" r:id="rId2"/>
     <p:sldId id="285" r:id="rId3"/>
     <p:sldId id="286" r:id="rId4"/>
     <p:sldId id="287" r:id="rId5"/>
-    <p:sldId id="288" r:id="rId6"/>
+    <p:sldId id="289" r:id="rId6"/>
+    <p:sldId id="288" r:id="rId7"/>
   </p:sldIdLst>
   <p:sldSz cx="9144000" cy="5143500" type="screen16x9"/>
   <p:notesSz cx="6858000" cy="9144000"/>
   <p:embeddedFontLst>
     <p:embeddedFont>
       <p:font typeface="Roboto" panose="02000000000000000000" pitchFamily="2" charset="0"/>
-      <p:regular r:id="rId8"/>
-      <p:bold r:id="rId9"/>
-      <p:italic r:id="rId10"/>
-      <p:boldItalic r:id="rId11"/>
+      <p:regular r:id="rId9"/>
+      <p:bold r:id="rId10"/>
+      <p:italic r:id="rId11"/>
+      <p:boldItalic r:id="rId12"/>
     </p:embeddedFont>
     <p:embeddedFont>
       <p:font typeface="Roboto Light" panose="02000000000000000000" pitchFamily="2" charset="0"/>
-      <p:regular r:id="rId12"/>
-      <p:bold r:id="rId13"/>
-      <p:italic r:id="rId14"/>
-      <p:boldItalic r:id="rId15"/>
+      <p:regular r:id="rId13"/>
+      <p:bold r:id="rId14"/>
+      <p:italic r:id="rId15"/>
+      <p:boldItalic r:id="rId16"/>
     </p:embeddedFont>
     <p:embeddedFont>
       <p:font typeface="Roboto Medium" panose="02000000000000000000" pitchFamily="2" charset="0"/>
-      <p:regular r:id="rId16"/>
-      <p:bold r:id="rId17"/>
-      <p:italic r:id="rId18"/>
-      <p:boldItalic r:id="rId19"/>
+      <p:regular r:id="rId17"/>
+      <p:bold r:id="rId18"/>
+      <p:italic r:id="rId19"/>
+      <p:boldItalic r:id="rId20"/>
     </p:embeddedFont>
   </p:embeddedFontLst>
   <p:defaultTextStyle>
@@ -290,8 +291,7 @@
 <file path=ppt/revisionInfo.xml><?xml version="1.0" encoding="utf-8"?>
 <p1510:revInfo xmlns:a="http://schemas.openxmlformats.org/drawingml/2006/main" xmlns:r="http://schemas.openxmlformats.org/officeDocument/2006/relationships" xmlns:p1510="http://schemas.microsoft.com/office/powerpoint/2015/10/main">
   <p1510:revLst>
-    <p1510:client id="{884297C3-F745-4D20-A4CC-60BC2E549996}" v="29" dt="2026-01-31T15:59:52.254"/>
-    <p1510:client id="{CAD58D26-74B9-4580-92A9-87C82EE9E6BB}" v="6" dt="2026-01-31T23:38:01.654"/>
+    <p1510:client id="{08538BA3-E02E-4E56-BD38-7471B398B370}" v="13" dt="2026-03-26T20:02:35.339"/>
   </p1510:revLst>
 </p1510:revInfo>
 </file>
@@ -301,1373 +301,142 @@
   <pc:docChgLst>
     <pc:chgData name="Zonghua Gu" userId="9a7e1853e1951ef5" providerId="LiveId" clId="{CF1FAA12-072C-4ED5-BA76-0FFFAEFDB88A}"/>
     <pc:docChg chg="undo redo custSel addSld delSld modSld">
-      <pc:chgData name="Zonghua Gu" userId="9a7e1853e1951ef5" providerId="LiveId" clId="{CF1FAA12-072C-4ED5-BA76-0FFFAEFDB88A}" dt="2026-01-31T23:38:34.972" v="445" actId="1076"/>
+      <pc:chgData name="Zonghua Gu" userId="9a7e1853e1951ef5" providerId="LiveId" clId="{CF1FAA12-072C-4ED5-BA76-0FFFAEFDB88A}" dt="2026-03-26T21:27:05.124" v="723" actId="20577"/>
       <pc:docMkLst>
         <pc:docMk/>
       </pc:docMkLst>
-      <pc:sldChg chg="addSp delSp modSp add del mod">
-        <pc:chgData name="Zonghua Gu" userId="9a7e1853e1951ef5" providerId="LiveId" clId="{CF1FAA12-072C-4ED5-BA76-0FFFAEFDB88A}" dt="2026-01-31T22:48:59.948" v="270" actId="1076"/>
-        <pc:sldMkLst>
-          <pc:docMk/>
-          <pc:sldMk cId="0" sldId="256"/>
-        </pc:sldMkLst>
-        <pc:spChg chg="add mod">
-          <ac:chgData name="Zonghua Gu" userId="9a7e1853e1951ef5" providerId="LiveId" clId="{CF1FAA12-072C-4ED5-BA76-0FFFAEFDB88A}" dt="2026-01-31T15:59:52.254" v="241"/>
-          <ac:spMkLst>
-            <pc:docMk/>
-            <pc:sldMk cId="0" sldId="256"/>
-            <ac:spMk id="2" creationId="{2DCD0B49-0F78-39FF-F288-5A32CBB998E7}"/>
-          </ac:spMkLst>
-        </pc:spChg>
-        <pc:spChg chg="del">
-          <ac:chgData name="Zonghua Gu" userId="9a7e1853e1951ef5" providerId="LiveId" clId="{CF1FAA12-072C-4ED5-BA76-0FFFAEFDB88A}" dt="2026-01-31T14:02:01.541" v="0" actId="478"/>
-          <ac:spMkLst>
-            <pc:docMk/>
-            <pc:sldMk cId="0" sldId="256"/>
-            <ac:spMk id="143" creationId="{00000000-0000-0000-0000-000000000000}"/>
-          </ac:spMkLst>
-        </pc:spChg>
-        <pc:spChg chg="mod">
-          <ac:chgData name="Zonghua Gu" userId="9a7e1853e1951ef5" providerId="LiveId" clId="{CF1FAA12-072C-4ED5-BA76-0FFFAEFDB88A}" dt="2026-01-31T22:48:59.948" v="270" actId="1076"/>
-          <ac:spMkLst>
-            <pc:docMk/>
-            <pc:sldMk cId="0" sldId="256"/>
-            <ac:spMk id="144" creationId="{00000000-0000-0000-0000-000000000000}"/>
-          </ac:spMkLst>
-        </pc:spChg>
-      </pc:sldChg>
-      <pc:sldChg chg="addSp modSp del mod modNotes">
-        <pc:chgData name="Zonghua Gu" userId="9a7e1853e1951ef5" providerId="LiveId" clId="{CF1FAA12-072C-4ED5-BA76-0FFFAEFDB88A}" dt="2026-01-31T22:49:50.992" v="271" actId="47"/>
-        <pc:sldMkLst>
-          <pc:docMk/>
-          <pc:sldMk cId="0" sldId="257"/>
-        </pc:sldMkLst>
-        <pc:spChg chg="add mod">
-          <ac:chgData name="Zonghua Gu" userId="9a7e1853e1951ef5" providerId="LiveId" clId="{CF1FAA12-072C-4ED5-BA76-0FFFAEFDB88A}" dt="2026-01-31T15:59:49.319" v="240"/>
-          <ac:spMkLst>
-            <pc:docMk/>
-            <pc:sldMk cId="0" sldId="257"/>
-            <ac:spMk id="2" creationId="{0D517BC8-62D2-F063-3868-17CE902D5E0B}"/>
-          </ac:spMkLst>
-        </pc:spChg>
-        <pc:spChg chg="mod">
-          <ac:chgData name="Zonghua Gu" userId="9a7e1853e1951ef5" providerId="LiveId" clId="{CF1FAA12-072C-4ED5-BA76-0FFFAEFDB88A}" dt="2026-01-31T22:48:34.469" v="252" actId="20577"/>
-          <ac:spMkLst>
-            <pc:docMk/>
-            <pc:sldMk cId="0" sldId="257"/>
-            <ac:spMk id="167" creationId="{00000000-0000-0000-0000-000000000000}"/>
-          </ac:spMkLst>
-        </pc:spChg>
-        <pc:spChg chg="mod">
-          <ac:chgData name="Zonghua Gu" userId="9a7e1853e1951ef5" providerId="LiveId" clId="{CF1FAA12-072C-4ED5-BA76-0FFFAEFDB88A}" dt="2026-01-31T14:13:13.659" v="199"/>
-          <ac:spMkLst>
-            <pc:docMk/>
-            <pc:sldMk cId="0" sldId="257"/>
-            <ac:spMk id="168" creationId="{00000000-0000-0000-0000-000000000000}"/>
-          </ac:spMkLst>
-        </pc:spChg>
-      </pc:sldChg>
-      <pc:sldChg chg="addSp new del mod">
-        <pc:chgData name="Zonghua Gu" userId="9a7e1853e1951ef5" providerId="LiveId" clId="{CF1FAA12-072C-4ED5-BA76-0FFFAEFDB88A}" dt="2026-01-31T23:33:55.821" v="313" actId="47"/>
-        <pc:sldMkLst>
-          <pc:docMk/>
-          <pc:sldMk cId="1714367460" sldId="257"/>
-        </pc:sldMkLst>
-        <pc:picChg chg="add">
-          <ac:chgData name="Zonghua Gu" userId="9a7e1853e1951ef5" providerId="LiveId" clId="{CF1FAA12-072C-4ED5-BA76-0FFFAEFDB88A}" dt="2026-01-31T23:27:36.868" v="275" actId="22"/>
-          <ac:picMkLst>
-            <pc:docMk/>
-            <pc:sldMk cId="1714367460" sldId="257"/>
-            <ac:picMk id="5" creationId="{B26D0731-F3C1-8329-0410-2EED3C82BD18}"/>
-          </ac:picMkLst>
-        </pc:picChg>
-      </pc:sldChg>
-      <pc:sldChg chg="new del">
-        <pc:chgData name="Zonghua Gu" userId="9a7e1853e1951ef5" providerId="LiveId" clId="{CF1FAA12-072C-4ED5-BA76-0FFFAEFDB88A}" dt="2026-01-31T23:06:09.284" v="273" actId="680"/>
-        <pc:sldMkLst>
-          <pc:docMk/>
-          <pc:sldMk cId="4235575083" sldId="257"/>
-        </pc:sldMkLst>
-      </pc:sldChg>
-      <pc:sldChg chg="del">
-        <pc:chgData name="Zonghua Gu" userId="9a7e1853e1951ef5" providerId="LiveId" clId="{CF1FAA12-072C-4ED5-BA76-0FFFAEFDB88A}" dt="2026-01-31T22:49:50.992" v="271" actId="47"/>
-        <pc:sldMkLst>
-          <pc:docMk/>
-          <pc:sldMk cId="0" sldId="258"/>
-        </pc:sldMkLst>
-      </pc:sldChg>
-      <pc:sldChg chg="del">
-        <pc:chgData name="Zonghua Gu" userId="9a7e1853e1951ef5" providerId="LiveId" clId="{CF1FAA12-072C-4ED5-BA76-0FFFAEFDB88A}" dt="2026-01-31T22:49:50.992" v="271" actId="47"/>
-        <pc:sldMkLst>
-          <pc:docMk/>
-          <pc:sldMk cId="0" sldId="259"/>
-        </pc:sldMkLst>
-      </pc:sldChg>
-      <pc:sldChg chg="modSp del mod">
-        <pc:chgData name="Zonghua Gu" userId="9a7e1853e1951ef5" providerId="LiveId" clId="{CF1FAA12-072C-4ED5-BA76-0FFFAEFDB88A}" dt="2026-01-31T22:49:50.992" v="271" actId="47"/>
-        <pc:sldMkLst>
-          <pc:docMk/>
-          <pc:sldMk cId="0" sldId="260"/>
-        </pc:sldMkLst>
-        <pc:spChg chg="mod">
-          <ac:chgData name="Zonghua Gu" userId="9a7e1853e1951ef5" providerId="LiveId" clId="{CF1FAA12-072C-4ED5-BA76-0FFFAEFDB88A}" dt="2026-01-31T14:03:36.762" v="31" actId="20577"/>
-          <ac:spMkLst>
-            <pc:docMk/>
-            <pc:sldMk cId="0" sldId="260"/>
-            <ac:spMk id="290" creationId="{00000000-0000-0000-0000-000000000000}"/>
-          </ac:spMkLst>
-        </pc:spChg>
-      </pc:sldChg>
-      <pc:sldChg chg="del">
-        <pc:chgData name="Zonghua Gu" userId="9a7e1853e1951ef5" providerId="LiveId" clId="{CF1FAA12-072C-4ED5-BA76-0FFFAEFDB88A}" dt="2026-01-31T22:49:50.992" v="271" actId="47"/>
-        <pc:sldMkLst>
-          <pc:docMk/>
-          <pc:sldMk cId="0" sldId="261"/>
-        </pc:sldMkLst>
-      </pc:sldChg>
-      <pc:sldChg chg="addSp delSp modSp del mod">
-        <pc:chgData name="Zonghua Gu" userId="9a7e1853e1951ef5" providerId="LiveId" clId="{CF1FAA12-072C-4ED5-BA76-0FFFAEFDB88A}" dt="2026-01-31T22:49:50.992" v="271" actId="47"/>
-        <pc:sldMkLst>
-          <pc:docMk/>
-          <pc:sldMk cId="0" sldId="262"/>
-        </pc:sldMkLst>
-        <pc:spChg chg="mod">
-          <ac:chgData name="Zonghua Gu" userId="9a7e1853e1951ef5" providerId="LiveId" clId="{CF1FAA12-072C-4ED5-BA76-0FFFAEFDB88A}" dt="2026-01-31T14:06:10.301" v="85" actId="1076"/>
-          <ac:spMkLst>
-            <pc:docMk/>
-            <pc:sldMk cId="0" sldId="262"/>
-            <ac:spMk id="354" creationId="{00000000-0000-0000-0000-000000000000}"/>
-          </ac:spMkLst>
-        </pc:spChg>
-        <pc:spChg chg="del">
-          <ac:chgData name="Zonghua Gu" userId="9a7e1853e1951ef5" providerId="LiveId" clId="{CF1FAA12-072C-4ED5-BA76-0FFFAEFDB88A}" dt="2026-01-31T14:04:50.386" v="58" actId="478"/>
-          <ac:spMkLst>
-            <pc:docMk/>
-            <pc:sldMk cId="0" sldId="262"/>
-            <ac:spMk id="356" creationId="{00000000-0000-0000-0000-000000000000}"/>
-          </ac:spMkLst>
-        </pc:spChg>
-        <pc:picChg chg="del">
-          <ac:chgData name="Zonghua Gu" userId="9a7e1853e1951ef5" providerId="LiveId" clId="{CF1FAA12-072C-4ED5-BA76-0FFFAEFDB88A}" dt="2026-01-31T14:04:50.386" v="58" actId="478"/>
-          <ac:picMkLst>
-            <pc:docMk/>
-            <pc:sldMk cId="0" sldId="262"/>
-            <ac:picMk id="355" creationId="{00000000-0000-0000-0000-000000000000}"/>
-          </ac:picMkLst>
-        </pc:picChg>
-        <pc:picChg chg="add mod">
-          <ac:chgData name="Zonghua Gu" userId="9a7e1853e1951ef5" providerId="LiveId" clId="{CF1FAA12-072C-4ED5-BA76-0FFFAEFDB88A}" dt="2026-01-31T14:05:59.481" v="83" actId="1076"/>
-          <ac:picMkLst>
-            <pc:docMk/>
-            <pc:sldMk cId="0" sldId="262"/>
-            <ac:picMk id="363" creationId="{00000000-0000-0000-0000-000000000000}"/>
-          </ac:picMkLst>
-        </pc:picChg>
-        <pc:picChg chg="add mod">
-          <ac:chgData name="Zonghua Gu" userId="9a7e1853e1951ef5" providerId="LiveId" clId="{CF1FAA12-072C-4ED5-BA76-0FFFAEFDB88A}" dt="2026-01-31T14:05:59.481" v="83" actId="1076"/>
-          <ac:picMkLst>
-            <pc:docMk/>
-            <pc:sldMk cId="0" sldId="262"/>
-            <ac:picMk id="370" creationId="{00000000-0000-0000-0000-000000000000}"/>
-          </ac:picMkLst>
-        </pc:picChg>
-      </pc:sldChg>
-      <pc:sldChg chg="delSp modSp del mod">
-        <pc:chgData name="Zonghua Gu" userId="9a7e1853e1951ef5" providerId="LiveId" clId="{CF1FAA12-072C-4ED5-BA76-0FFFAEFDB88A}" dt="2026-01-31T14:06:13.244" v="86" actId="47"/>
-        <pc:sldMkLst>
-          <pc:docMk/>
-          <pc:sldMk cId="0" sldId="263"/>
-        </pc:sldMkLst>
-        <pc:spChg chg="mod">
-          <ac:chgData name="Zonghua Gu" userId="9a7e1853e1951ef5" providerId="LiveId" clId="{CF1FAA12-072C-4ED5-BA76-0FFFAEFDB88A}" dt="2026-01-31T14:05:47.833" v="79" actId="21"/>
-          <ac:spMkLst>
-            <pc:docMk/>
-            <pc:sldMk cId="0" sldId="263"/>
-            <ac:spMk id="362" creationId="{00000000-0000-0000-0000-000000000000}"/>
-          </ac:spMkLst>
-        </pc:spChg>
-        <pc:picChg chg="del">
-          <ac:chgData name="Zonghua Gu" userId="9a7e1853e1951ef5" providerId="LiveId" clId="{CF1FAA12-072C-4ED5-BA76-0FFFAEFDB88A}" dt="2026-01-31T14:05:08.344" v="61" actId="21"/>
-          <ac:picMkLst>
-            <pc:docMk/>
-            <pc:sldMk cId="0" sldId="263"/>
-            <ac:picMk id="363" creationId="{00000000-0000-0000-0000-000000000000}"/>
-          </ac:picMkLst>
-        </pc:picChg>
-      </pc:sldChg>
-      <pc:sldChg chg="delSp modSp del mod">
-        <pc:chgData name="Zonghua Gu" userId="9a7e1853e1951ef5" providerId="LiveId" clId="{CF1FAA12-072C-4ED5-BA76-0FFFAEFDB88A}" dt="2026-01-31T14:06:13.244" v="86" actId="47"/>
-        <pc:sldMkLst>
-          <pc:docMk/>
-          <pc:sldMk cId="0" sldId="264"/>
-        </pc:sldMkLst>
-        <pc:spChg chg="mod">
-          <ac:chgData name="Zonghua Gu" userId="9a7e1853e1951ef5" providerId="LiveId" clId="{CF1FAA12-072C-4ED5-BA76-0FFFAEFDB88A}" dt="2026-01-31T14:05:51.906" v="80" actId="21"/>
-          <ac:spMkLst>
-            <pc:docMk/>
-            <pc:sldMk cId="0" sldId="264"/>
-            <ac:spMk id="369" creationId="{00000000-0000-0000-0000-000000000000}"/>
-          </ac:spMkLst>
-        </pc:spChg>
-        <pc:picChg chg="del">
-          <ac:chgData name="Zonghua Gu" userId="9a7e1853e1951ef5" providerId="LiveId" clId="{CF1FAA12-072C-4ED5-BA76-0FFFAEFDB88A}" dt="2026-01-31T14:05:16.921" v="64" actId="21"/>
-          <ac:picMkLst>
-            <pc:docMk/>
-            <pc:sldMk cId="0" sldId="264"/>
-            <ac:picMk id="370" creationId="{00000000-0000-0000-0000-000000000000}"/>
-          </ac:picMkLst>
-        </pc:picChg>
-      </pc:sldChg>
-      <pc:sldChg chg="modSp del mod">
-        <pc:chgData name="Zonghua Gu" userId="9a7e1853e1951ef5" providerId="LiveId" clId="{CF1FAA12-072C-4ED5-BA76-0FFFAEFDB88A}" dt="2026-01-31T22:49:50.992" v="271" actId="47"/>
-        <pc:sldMkLst>
-          <pc:docMk/>
-          <pc:sldMk cId="0" sldId="265"/>
-        </pc:sldMkLst>
-        <pc:spChg chg="mod">
-          <ac:chgData name="Zonghua Gu" userId="9a7e1853e1951ef5" providerId="LiveId" clId="{CF1FAA12-072C-4ED5-BA76-0FFFAEFDB88A}" dt="2026-01-31T14:06:34.550" v="99" actId="20577"/>
-          <ac:spMkLst>
-            <pc:docMk/>
-            <pc:sldMk cId="0" sldId="265"/>
-            <ac:spMk id="376" creationId="{00000000-0000-0000-0000-000000000000}"/>
-          </ac:spMkLst>
-        </pc:spChg>
-        <pc:spChg chg="mod">
-          <ac:chgData name="Zonghua Gu" userId="9a7e1853e1951ef5" providerId="LiveId" clId="{CF1FAA12-072C-4ED5-BA76-0FFFAEFDB88A}" dt="2026-01-31T14:06:46.270" v="100" actId="20577"/>
-          <ac:spMkLst>
-            <pc:docMk/>
-            <pc:sldMk cId="0" sldId="265"/>
-            <ac:spMk id="378" creationId="{00000000-0000-0000-0000-000000000000}"/>
-          </ac:spMkLst>
-        </pc:spChg>
-      </pc:sldChg>
-      <pc:sldChg chg="modSp del modNotes">
-        <pc:chgData name="Zonghua Gu" userId="9a7e1853e1951ef5" providerId="LiveId" clId="{CF1FAA12-072C-4ED5-BA76-0FFFAEFDB88A}" dt="2026-01-31T22:49:50.992" v="271" actId="47"/>
-        <pc:sldMkLst>
-          <pc:docMk/>
-          <pc:sldMk cId="0" sldId="266"/>
-        </pc:sldMkLst>
-        <pc:spChg chg="mod">
-          <ac:chgData name="Zonghua Gu" userId="9a7e1853e1951ef5" providerId="LiveId" clId="{CF1FAA12-072C-4ED5-BA76-0FFFAEFDB88A}" dt="2026-01-31T14:13:13.659" v="199"/>
-          <ac:spMkLst>
-            <pc:docMk/>
-            <pc:sldMk cId="0" sldId="266"/>
-            <ac:spMk id="385" creationId="{00000000-0000-0000-0000-000000000000}"/>
-          </ac:spMkLst>
-        </pc:spChg>
-      </pc:sldChg>
-      <pc:sldChg chg="del">
-        <pc:chgData name="Zonghua Gu" userId="9a7e1853e1951ef5" providerId="LiveId" clId="{CF1FAA12-072C-4ED5-BA76-0FFFAEFDB88A}" dt="2026-01-31T22:49:50.992" v="271" actId="47"/>
-        <pc:sldMkLst>
-          <pc:docMk/>
-          <pc:sldMk cId="0" sldId="267"/>
-        </pc:sldMkLst>
-      </pc:sldChg>
-      <pc:sldChg chg="modSp del mod">
-        <pc:chgData name="Zonghua Gu" userId="9a7e1853e1951ef5" providerId="LiveId" clId="{CF1FAA12-072C-4ED5-BA76-0FFFAEFDB88A}" dt="2026-01-31T22:49:50.992" v="271" actId="47"/>
-        <pc:sldMkLst>
-          <pc:docMk/>
-          <pc:sldMk cId="0" sldId="268"/>
-        </pc:sldMkLst>
-        <pc:spChg chg="mod">
-          <ac:chgData name="Zonghua Gu" userId="9a7e1853e1951ef5" providerId="LiveId" clId="{CF1FAA12-072C-4ED5-BA76-0FFFAEFDB88A}" dt="2026-01-31T14:10:41.330" v="179" actId="14100"/>
-          <ac:spMkLst>
-            <pc:docMk/>
-            <pc:sldMk cId="0" sldId="268"/>
-            <ac:spMk id="397" creationId="{00000000-0000-0000-0000-000000000000}"/>
-          </ac:spMkLst>
-        </pc:spChg>
-        <pc:spChg chg="mod">
-          <ac:chgData name="Zonghua Gu" userId="9a7e1853e1951ef5" providerId="LiveId" clId="{CF1FAA12-072C-4ED5-BA76-0FFFAEFDB88A}" dt="2026-01-31T14:10:38.407" v="178" actId="1076"/>
-          <ac:spMkLst>
-            <pc:docMk/>
-            <pc:sldMk cId="0" sldId="268"/>
-            <ac:spMk id="398" creationId="{00000000-0000-0000-0000-000000000000}"/>
-          </ac:spMkLst>
-        </pc:spChg>
-        <pc:spChg chg="mod">
-          <ac:chgData name="Zonghua Gu" userId="9a7e1853e1951ef5" providerId="LiveId" clId="{CF1FAA12-072C-4ED5-BA76-0FFFAEFDB88A}" dt="2026-01-31T14:10:38.407" v="178" actId="1076"/>
-          <ac:spMkLst>
-            <pc:docMk/>
-            <pc:sldMk cId="0" sldId="268"/>
-            <ac:spMk id="399" creationId="{00000000-0000-0000-0000-000000000000}"/>
-          </ac:spMkLst>
-        </pc:spChg>
-        <pc:spChg chg="mod">
-          <ac:chgData name="Zonghua Gu" userId="9a7e1853e1951ef5" providerId="LiveId" clId="{CF1FAA12-072C-4ED5-BA76-0FFFAEFDB88A}" dt="2026-01-31T14:10:38.407" v="178" actId="1076"/>
-          <ac:spMkLst>
-            <pc:docMk/>
-            <pc:sldMk cId="0" sldId="268"/>
-            <ac:spMk id="400" creationId="{00000000-0000-0000-0000-000000000000}"/>
-          </ac:spMkLst>
-        </pc:spChg>
-        <pc:spChg chg="mod">
-          <ac:chgData name="Zonghua Gu" userId="9a7e1853e1951ef5" providerId="LiveId" clId="{CF1FAA12-072C-4ED5-BA76-0FFFAEFDB88A}" dt="2026-01-31T14:10:38.407" v="178" actId="1076"/>
-          <ac:spMkLst>
-            <pc:docMk/>
-            <pc:sldMk cId="0" sldId="268"/>
-            <ac:spMk id="401" creationId="{00000000-0000-0000-0000-000000000000}"/>
-          </ac:spMkLst>
-        </pc:spChg>
-        <pc:spChg chg="mod">
-          <ac:chgData name="Zonghua Gu" userId="9a7e1853e1951ef5" providerId="LiveId" clId="{CF1FAA12-072C-4ED5-BA76-0FFFAEFDB88A}" dt="2026-01-31T14:10:38.407" v="178" actId="1076"/>
-          <ac:spMkLst>
-            <pc:docMk/>
-            <pc:sldMk cId="0" sldId="268"/>
-            <ac:spMk id="402" creationId="{00000000-0000-0000-0000-000000000000}"/>
-          </ac:spMkLst>
-        </pc:spChg>
-        <pc:spChg chg="mod">
-          <ac:chgData name="Zonghua Gu" userId="9a7e1853e1951ef5" providerId="LiveId" clId="{CF1FAA12-072C-4ED5-BA76-0FFFAEFDB88A}" dt="2026-01-31T14:10:38.407" v="178" actId="1076"/>
-          <ac:spMkLst>
-            <pc:docMk/>
-            <pc:sldMk cId="0" sldId="268"/>
-            <ac:spMk id="403" creationId="{00000000-0000-0000-0000-000000000000}"/>
-          </ac:spMkLst>
-        </pc:spChg>
-        <pc:spChg chg="mod">
-          <ac:chgData name="Zonghua Gu" userId="9a7e1853e1951ef5" providerId="LiveId" clId="{CF1FAA12-072C-4ED5-BA76-0FFFAEFDB88A}" dt="2026-01-31T14:10:38.407" v="178" actId="1076"/>
-          <ac:spMkLst>
-            <pc:docMk/>
-            <pc:sldMk cId="0" sldId="268"/>
-            <ac:spMk id="404" creationId="{00000000-0000-0000-0000-000000000000}"/>
-          </ac:spMkLst>
-        </pc:spChg>
-        <pc:spChg chg="mod">
-          <ac:chgData name="Zonghua Gu" userId="9a7e1853e1951ef5" providerId="LiveId" clId="{CF1FAA12-072C-4ED5-BA76-0FFFAEFDB88A}" dt="2026-01-31T14:10:38.407" v="178" actId="1076"/>
-          <ac:spMkLst>
-            <pc:docMk/>
-            <pc:sldMk cId="0" sldId="268"/>
-            <ac:spMk id="405" creationId="{00000000-0000-0000-0000-000000000000}"/>
-          </ac:spMkLst>
-        </pc:spChg>
-        <pc:cxnChg chg="mod">
-          <ac:chgData name="Zonghua Gu" userId="9a7e1853e1951ef5" providerId="LiveId" clId="{CF1FAA12-072C-4ED5-BA76-0FFFAEFDB88A}" dt="2026-01-31T14:10:38.407" v="178" actId="1076"/>
-          <ac:cxnSpMkLst>
-            <pc:docMk/>
-            <pc:sldMk cId="0" sldId="268"/>
-            <ac:cxnSpMk id="406" creationId="{00000000-0000-0000-0000-000000000000}"/>
-          </ac:cxnSpMkLst>
-        </pc:cxnChg>
-        <pc:cxnChg chg="mod">
-          <ac:chgData name="Zonghua Gu" userId="9a7e1853e1951ef5" providerId="LiveId" clId="{CF1FAA12-072C-4ED5-BA76-0FFFAEFDB88A}" dt="2026-01-31T14:10:38.407" v="178" actId="1076"/>
-          <ac:cxnSpMkLst>
-            <pc:docMk/>
-            <pc:sldMk cId="0" sldId="268"/>
-            <ac:cxnSpMk id="410" creationId="{00000000-0000-0000-0000-000000000000}"/>
-          </ac:cxnSpMkLst>
-        </pc:cxnChg>
-      </pc:sldChg>
-      <pc:sldChg chg="addSp modSp del mod">
-        <pc:chgData name="Zonghua Gu" userId="9a7e1853e1951ef5" providerId="LiveId" clId="{CF1FAA12-072C-4ED5-BA76-0FFFAEFDB88A}" dt="2026-01-31T22:49:50.992" v="271" actId="47"/>
-        <pc:sldMkLst>
-          <pc:docMk/>
-          <pc:sldMk cId="0" sldId="269"/>
-        </pc:sldMkLst>
-        <pc:spChg chg="add mod">
-          <ac:chgData name="Zonghua Gu" userId="9a7e1853e1951ef5" providerId="LiveId" clId="{CF1FAA12-072C-4ED5-BA76-0FFFAEFDB88A}" dt="2026-01-31T14:08:54.472" v="136" actId="571"/>
-          <ac:spMkLst>
-            <pc:docMk/>
-            <pc:sldMk cId="0" sldId="269"/>
-            <ac:spMk id="2" creationId="{7F8E76F6-05B9-20A4-5AFE-F6EE263E60BF}"/>
-          </ac:spMkLst>
-        </pc:spChg>
-        <pc:spChg chg="add mod">
-          <ac:chgData name="Zonghua Gu" userId="9a7e1853e1951ef5" providerId="LiveId" clId="{CF1FAA12-072C-4ED5-BA76-0FFFAEFDB88A}" dt="2026-01-31T14:09:57.528" v="170" actId="1036"/>
-          <ac:spMkLst>
-            <pc:docMk/>
-            <pc:sldMk cId="0" sldId="269"/>
-            <ac:spMk id="3" creationId="{F0BD812E-7BA8-5918-6158-340E910205C6}"/>
-          </ac:spMkLst>
-        </pc:spChg>
-        <pc:spChg chg="mod">
-          <ac:chgData name="Zonghua Gu" userId="9a7e1853e1951ef5" providerId="LiveId" clId="{CF1FAA12-072C-4ED5-BA76-0FFFAEFDB88A}" dt="2026-01-31T14:09:57.528" v="170" actId="1036"/>
-          <ac:spMkLst>
-            <pc:docMk/>
-            <pc:sldMk cId="0" sldId="269"/>
-            <ac:spMk id="422" creationId="{00000000-0000-0000-0000-000000000000}"/>
-          </ac:spMkLst>
-        </pc:spChg>
-        <pc:spChg chg="mod">
-          <ac:chgData name="Zonghua Gu" userId="9a7e1853e1951ef5" providerId="LiveId" clId="{CF1FAA12-072C-4ED5-BA76-0FFFAEFDB88A}" dt="2026-01-31T14:07:42.400" v="101" actId="1076"/>
-          <ac:spMkLst>
-            <pc:docMk/>
-            <pc:sldMk cId="0" sldId="269"/>
-            <ac:spMk id="423" creationId="{00000000-0000-0000-0000-000000000000}"/>
-          </ac:spMkLst>
-        </pc:spChg>
-        <pc:spChg chg="mod">
-          <ac:chgData name="Zonghua Gu" userId="9a7e1853e1951ef5" providerId="LiveId" clId="{CF1FAA12-072C-4ED5-BA76-0FFFAEFDB88A}" dt="2026-01-31T14:07:42.400" v="101" actId="1076"/>
-          <ac:spMkLst>
-            <pc:docMk/>
-            <pc:sldMk cId="0" sldId="269"/>
-            <ac:spMk id="424" creationId="{00000000-0000-0000-0000-000000000000}"/>
-          </ac:spMkLst>
-        </pc:spChg>
-        <pc:spChg chg="mod">
-          <ac:chgData name="Zonghua Gu" userId="9a7e1853e1951ef5" providerId="LiveId" clId="{CF1FAA12-072C-4ED5-BA76-0FFFAEFDB88A}" dt="2026-01-31T14:07:42.400" v="101" actId="1076"/>
-          <ac:spMkLst>
-            <pc:docMk/>
-            <pc:sldMk cId="0" sldId="269"/>
-            <ac:spMk id="425" creationId="{00000000-0000-0000-0000-000000000000}"/>
-          </ac:spMkLst>
-        </pc:spChg>
-        <pc:spChg chg="mod">
-          <ac:chgData name="Zonghua Gu" userId="9a7e1853e1951ef5" providerId="LiveId" clId="{CF1FAA12-072C-4ED5-BA76-0FFFAEFDB88A}" dt="2026-01-31T14:07:42.400" v="101" actId="1076"/>
-          <ac:spMkLst>
-            <pc:docMk/>
-            <pc:sldMk cId="0" sldId="269"/>
-            <ac:spMk id="426" creationId="{00000000-0000-0000-0000-000000000000}"/>
-          </ac:spMkLst>
-        </pc:spChg>
-        <pc:spChg chg="mod">
-          <ac:chgData name="Zonghua Gu" userId="9a7e1853e1951ef5" providerId="LiveId" clId="{CF1FAA12-072C-4ED5-BA76-0FFFAEFDB88A}" dt="2026-01-31T14:07:42.400" v="101" actId="1076"/>
-          <ac:spMkLst>
-            <pc:docMk/>
-            <pc:sldMk cId="0" sldId="269"/>
-            <ac:spMk id="427" creationId="{00000000-0000-0000-0000-000000000000}"/>
-          </ac:spMkLst>
-        </pc:spChg>
-        <pc:spChg chg="mod">
-          <ac:chgData name="Zonghua Gu" userId="9a7e1853e1951ef5" providerId="LiveId" clId="{CF1FAA12-072C-4ED5-BA76-0FFFAEFDB88A}" dt="2026-01-31T14:07:42.400" v="101" actId="1076"/>
-          <ac:spMkLst>
-            <pc:docMk/>
-            <pc:sldMk cId="0" sldId="269"/>
-            <ac:spMk id="428" creationId="{00000000-0000-0000-0000-000000000000}"/>
-          </ac:spMkLst>
-        </pc:spChg>
-        <pc:spChg chg="mod">
-          <ac:chgData name="Zonghua Gu" userId="9a7e1853e1951ef5" providerId="LiveId" clId="{CF1FAA12-072C-4ED5-BA76-0FFFAEFDB88A}" dt="2026-01-31T14:07:42.400" v="101" actId="1076"/>
-          <ac:spMkLst>
-            <pc:docMk/>
-            <pc:sldMk cId="0" sldId="269"/>
-            <ac:spMk id="429" creationId="{00000000-0000-0000-0000-000000000000}"/>
-          </ac:spMkLst>
-        </pc:spChg>
-        <pc:spChg chg="mod">
-          <ac:chgData name="Zonghua Gu" userId="9a7e1853e1951ef5" providerId="LiveId" clId="{CF1FAA12-072C-4ED5-BA76-0FFFAEFDB88A}" dt="2026-01-31T14:07:42.400" v="101" actId="1076"/>
-          <ac:spMkLst>
-            <pc:docMk/>
-            <pc:sldMk cId="0" sldId="269"/>
-            <ac:spMk id="430" creationId="{00000000-0000-0000-0000-000000000000}"/>
-          </ac:spMkLst>
-        </pc:spChg>
-        <pc:spChg chg="add mod">
-          <ac:chgData name="Zonghua Gu" userId="9a7e1853e1951ef5" providerId="LiveId" clId="{CF1FAA12-072C-4ED5-BA76-0FFFAEFDB88A}" dt="2026-01-31T14:07:52.162" v="106" actId="1076"/>
-          <ac:spMkLst>
-            <pc:docMk/>
-            <pc:sldMk cId="0" sldId="269"/>
-            <ac:spMk id="446" creationId="{00000000-0000-0000-0000-000000000000}"/>
-          </ac:spMkLst>
-        </pc:spChg>
-        <pc:spChg chg="add mod">
-          <ac:chgData name="Zonghua Gu" userId="9a7e1853e1951ef5" providerId="LiveId" clId="{CF1FAA12-072C-4ED5-BA76-0FFFAEFDB88A}" dt="2026-01-31T14:07:52.162" v="106" actId="1076"/>
-          <ac:spMkLst>
-            <pc:docMk/>
-            <pc:sldMk cId="0" sldId="269"/>
-            <ac:spMk id="447" creationId="{00000000-0000-0000-0000-000000000000}"/>
-          </ac:spMkLst>
-        </pc:spChg>
-        <pc:spChg chg="add mod">
-          <ac:chgData name="Zonghua Gu" userId="9a7e1853e1951ef5" providerId="LiveId" clId="{CF1FAA12-072C-4ED5-BA76-0FFFAEFDB88A}" dt="2026-01-31T14:07:52.162" v="106" actId="1076"/>
-          <ac:spMkLst>
-            <pc:docMk/>
-            <pc:sldMk cId="0" sldId="269"/>
-            <ac:spMk id="448" creationId="{00000000-0000-0000-0000-000000000000}"/>
-          </ac:spMkLst>
-        </pc:spChg>
-        <pc:spChg chg="add mod">
-          <ac:chgData name="Zonghua Gu" userId="9a7e1853e1951ef5" providerId="LiveId" clId="{CF1FAA12-072C-4ED5-BA76-0FFFAEFDB88A}" dt="2026-01-31T14:07:52.162" v="106" actId="1076"/>
-          <ac:spMkLst>
-            <pc:docMk/>
-            <pc:sldMk cId="0" sldId="269"/>
-            <ac:spMk id="449" creationId="{00000000-0000-0000-0000-000000000000}"/>
-          </ac:spMkLst>
-        </pc:spChg>
-        <pc:spChg chg="add mod">
-          <ac:chgData name="Zonghua Gu" userId="9a7e1853e1951ef5" providerId="LiveId" clId="{CF1FAA12-072C-4ED5-BA76-0FFFAEFDB88A}" dt="2026-01-31T14:07:52.162" v="106" actId="1076"/>
-          <ac:spMkLst>
-            <pc:docMk/>
-            <pc:sldMk cId="0" sldId="269"/>
-            <ac:spMk id="450" creationId="{00000000-0000-0000-0000-000000000000}"/>
-          </ac:spMkLst>
-        </pc:spChg>
-        <pc:spChg chg="add mod">
-          <ac:chgData name="Zonghua Gu" userId="9a7e1853e1951ef5" providerId="LiveId" clId="{CF1FAA12-072C-4ED5-BA76-0FFFAEFDB88A}" dt="2026-01-31T14:07:52.162" v="106" actId="1076"/>
-          <ac:spMkLst>
-            <pc:docMk/>
-            <pc:sldMk cId="0" sldId="269"/>
-            <ac:spMk id="451" creationId="{00000000-0000-0000-0000-000000000000}"/>
-          </ac:spMkLst>
-        </pc:spChg>
-        <pc:spChg chg="add mod">
-          <ac:chgData name="Zonghua Gu" userId="9a7e1853e1951ef5" providerId="LiveId" clId="{CF1FAA12-072C-4ED5-BA76-0FFFAEFDB88A}" dt="2026-01-31T14:07:52.162" v="106" actId="1076"/>
-          <ac:spMkLst>
-            <pc:docMk/>
-            <pc:sldMk cId="0" sldId="269"/>
-            <ac:spMk id="452" creationId="{00000000-0000-0000-0000-000000000000}"/>
-          </ac:spMkLst>
-        </pc:spChg>
-        <pc:spChg chg="add mod">
-          <ac:chgData name="Zonghua Gu" userId="9a7e1853e1951ef5" providerId="LiveId" clId="{CF1FAA12-072C-4ED5-BA76-0FFFAEFDB88A}" dt="2026-01-31T14:07:52.162" v="106" actId="1076"/>
-          <ac:spMkLst>
-            <pc:docMk/>
-            <pc:sldMk cId="0" sldId="269"/>
-            <ac:spMk id="453" creationId="{00000000-0000-0000-0000-000000000000}"/>
-          </ac:spMkLst>
-        </pc:spChg>
-        <pc:cxnChg chg="mod">
-          <ac:chgData name="Zonghua Gu" userId="9a7e1853e1951ef5" providerId="LiveId" clId="{CF1FAA12-072C-4ED5-BA76-0FFFAEFDB88A}" dt="2026-01-31T14:07:42.400" v="101" actId="1076"/>
-          <ac:cxnSpMkLst>
-            <pc:docMk/>
-            <pc:sldMk cId="0" sldId="269"/>
-            <ac:cxnSpMk id="437" creationId="{00000000-0000-0000-0000-000000000000}"/>
-          </ac:cxnSpMkLst>
-        </pc:cxnChg>
-        <pc:cxnChg chg="mod">
-          <ac:chgData name="Zonghua Gu" userId="9a7e1853e1951ef5" providerId="LiveId" clId="{CF1FAA12-072C-4ED5-BA76-0FFFAEFDB88A}" dt="2026-01-31T14:07:42.400" v="101" actId="1076"/>
-          <ac:cxnSpMkLst>
-            <pc:docMk/>
-            <pc:sldMk cId="0" sldId="269"/>
-            <ac:cxnSpMk id="439" creationId="{00000000-0000-0000-0000-000000000000}"/>
-          </ac:cxnSpMkLst>
-        </pc:cxnChg>
-        <pc:cxnChg chg="add mod">
-          <ac:chgData name="Zonghua Gu" userId="9a7e1853e1951ef5" providerId="LiveId" clId="{CF1FAA12-072C-4ED5-BA76-0FFFAEFDB88A}" dt="2026-01-31T14:07:52.162" v="106" actId="1076"/>
-          <ac:cxnSpMkLst>
-            <pc:docMk/>
-            <pc:sldMk cId="0" sldId="269"/>
-            <ac:cxnSpMk id="460" creationId="{00000000-0000-0000-0000-000000000000}"/>
-          </ac:cxnSpMkLst>
-        </pc:cxnChg>
-        <pc:cxnChg chg="add mod">
-          <ac:chgData name="Zonghua Gu" userId="9a7e1853e1951ef5" providerId="LiveId" clId="{CF1FAA12-072C-4ED5-BA76-0FFFAEFDB88A}" dt="2026-01-31T14:07:52.162" v="106" actId="1076"/>
-          <ac:cxnSpMkLst>
-            <pc:docMk/>
-            <pc:sldMk cId="0" sldId="269"/>
-            <ac:cxnSpMk id="461" creationId="{00000000-0000-0000-0000-000000000000}"/>
-          </ac:cxnSpMkLst>
-        </pc:cxnChg>
-      </pc:sldChg>
-      <pc:sldChg chg="delSp modSp del mod">
-        <pc:chgData name="Zonghua Gu" userId="9a7e1853e1951ef5" providerId="LiveId" clId="{CF1FAA12-072C-4ED5-BA76-0FFFAEFDB88A}" dt="2026-01-31T14:10:00.713" v="171" actId="47"/>
-        <pc:sldMkLst>
-          <pc:docMk/>
-          <pc:sldMk cId="0" sldId="270"/>
-        </pc:sldMkLst>
-        <pc:spChg chg="mod">
-          <ac:chgData name="Zonghua Gu" userId="9a7e1853e1951ef5" providerId="LiveId" clId="{CF1FAA12-072C-4ED5-BA76-0FFFAEFDB88A}" dt="2026-01-31T14:08:57.040" v="139" actId="21"/>
-          <ac:spMkLst>
-            <pc:docMk/>
-            <pc:sldMk cId="0" sldId="270"/>
-            <ac:spMk id="445" creationId="{00000000-0000-0000-0000-000000000000}"/>
-          </ac:spMkLst>
-        </pc:spChg>
-        <pc:spChg chg="del">
-          <ac:chgData name="Zonghua Gu" userId="9a7e1853e1951ef5" providerId="LiveId" clId="{CF1FAA12-072C-4ED5-BA76-0FFFAEFDB88A}" dt="2026-01-31T14:07:47.340" v="104" actId="21"/>
-          <ac:spMkLst>
-            <pc:docMk/>
-            <pc:sldMk cId="0" sldId="270"/>
-            <ac:spMk id="446" creationId="{00000000-0000-0000-0000-000000000000}"/>
-          </ac:spMkLst>
-        </pc:spChg>
-        <pc:spChg chg="del">
-          <ac:chgData name="Zonghua Gu" userId="9a7e1853e1951ef5" providerId="LiveId" clId="{CF1FAA12-072C-4ED5-BA76-0FFFAEFDB88A}" dt="2026-01-31T14:07:47.340" v="104" actId="21"/>
-          <ac:spMkLst>
-            <pc:docMk/>
-            <pc:sldMk cId="0" sldId="270"/>
-            <ac:spMk id="447" creationId="{00000000-0000-0000-0000-000000000000}"/>
-          </ac:spMkLst>
-        </pc:spChg>
-        <pc:spChg chg="del">
-          <ac:chgData name="Zonghua Gu" userId="9a7e1853e1951ef5" providerId="LiveId" clId="{CF1FAA12-072C-4ED5-BA76-0FFFAEFDB88A}" dt="2026-01-31T14:07:47.340" v="104" actId="21"/>
-          <ac:spMkLst>
-            <pc:docMk/>
-            <pc:sldMk cId="0" sldId="270"/>
-            <ac:spMk id="448" creationId="{00000000-0000-0000-0000-000000000000}"/>
-          </ac:spMkLst>
-        </pc:spChg>
-        <pc:spChg chg="del">
-          <ac:chgData name="Zonghua Gu" userId="9a7e1853e1951ef5" providerId="LiveId" clId="{CF1FAA12-072C-4ED5-BA76-0FFFAEFDB88A}" dt="2026-01-31T14:07:47.340" v="104" actId="21"/>
-          <ac:spMkLst>
-            <pc:docMk/>
-            <pc:sldMk cId="0" sldId="270"/>
-            <ac:spMk id="449" creationId="{00000000-0000-0000-0000-000000000000}"/>
-          </ac:spMkLst>
-        </pc:spChg>
-        <pc:spChg chg="del">
-          <ac:chgData name="Zonghua Gu" userId="9a7e1853e1951ef5" providerId="LiveId" clId="{CF1FAA12-072C-4ED5-BA76-0FFFAEFDB88A}" dt="2026-01-31T14:07:47.340" v="104" actId="21"/>
-          <ac:spMkLst>
-            <pc:docMk/>
-            <pc:sldMk cId="0" sldId="270"/>
-            <ac:spMk id="450" creationId="{00000000-0000-0000-0000-000000000000}"/>
-          </ac:spMkLst>
-        </pc:spChg>
-        <pc:spChg chg="del">
-          <ac:chgData name="Zonghua Gu" userId="9a7e1853e1951ef5" providerId="LiveId" clId="{CF1FAA12-072C-4ED5-BA76-0FFFAEFDB88A}" dt="2026-01-31T14:07:47.340" v="104" actId="21"/>
-          <ac:spMkLst>
-            <pc:docMk/>
-            <pc:sldMk cId="0" sldId="270"/>
-            <ac:spMk id="451" creationId="{00000000-0000-0000-0000-000000000000}"/>
-          </ac:spMkLst>
-        </pc:spChg>
-        <pc:spChg chg="del">
-          <ac:chgData name="Zonghua Gu" userId="9a7e1853e1951ef5" providerId="LiveId" clId="{CF1FAA12-072C-4ED5-BA76-0FFFAEFDB88A}" dt="2026-01-31T14:07:47.340" v="104" actId="21"/>
-          <ac:spMkLst>
-            <pc:docMk/>
-            <pc:sldMk cId="0" sldId="270"/>
-            <ac:spMk id="452" creationId="{00000000-0000-0000-0000-000000000000}"/>
-          </ac:spMkLst>
-        </pc:spChg>
-        <pc:spChg chg="del">
-          <ac:chgData name="Zonghua Gu" userId="9a7e1853e1951ef5" providerId="LiveId" clId="{CF1FAA12-072C-4ED5-BA76-0FFFAEFDB88A}" dt="2026-01-31T14:07:47.340" v="104" actId="21"/>
-          <ac:spMkLst>
-            <pc:docMk/>
-            <pc:sldMk cId="0" sldId="270"/>
-            <ac:spMk id="453" creationId="{00000000-0000-0000-0000-000000000000}"/>
-          </ac:spMkLst>
-        </pc:spChg>
-        <pc:cxnChg chg="del mod">
-          <ac:chgData name="Zonghua Gu" userId="9a7e1853e1951ef5" providerId="LiveId" clId="{CF1FAA12-072C-4ED5-BA76-0FFFAEFDB88A}" dt="2026-01-31T14:07:47.340" v="104" actId="21"/>
-          <ac:cxnSpMkLst>
-            <pc:docMk/>
-            <pc:sldMk cId="0" sldId="270"/>
-            <ac:cxnSpMk id="457" creationId="{00000000-0000-0000-0000-000000000000}"/>
-          </ac:cxnSpMkLst>
-        </pc:cxnChg>
-        <pc:cxnChg chg="del mod">
-          <ac:chgData name="Zonghua Gu" userId="9a7e1853e1951ef5" providerId="LiveId" clId="{CF1FAA12-072C-4ED5-BA76-0FFFAEFDB88A}" dt="2026-01-31T14:07:47.340" v="104" actId="21"/>
-          <ac:cxnSpMkLst>
-            <pc:docMk/>
-            <pc:sldMk cId="0" sldId="270"/>
-            <ac:cxnSpMk id="459" creationId="{00000000-0000-0000-0000-000000000000}"/>
-          </ac:cxnSpMkLst>
-        </pc:cxnChg>
-      </pc:sldChg>
-      <pc:sldChg chg="del">
-        <pc:chgData name="Zonghua Gu" userId="9a7e1853e1951ef5" providerId="LiveId" clId="{CF1FAA12-072C-4ED5-BA76-0FFFAEFDB88A}" dt="2026-01-31T22:49:50.992" v="271" actId="47"/>
-        <pc:sldMkLst>
-          <pc:docMk/>
-          <pc:sldMk cId="0" sldId="271"/>
-        </pc:sldMkLst>
-      </pc:sldChg>
-      <pc:sldChg chg="modSp del mod">
-        <pc:chgData name="Zonghua Gu" userId="9a7e1853e1951ef5" providerId="LiveId" clId="{CF1FAA12-072C-4ED5-BA76-0FFFAEFDB88A}" dt="2026-01-31T14:10:45.885" v="180" actId="47"/>
-        <pc:sldMkLst>
-          <pc:docMk/>
-          <pc:sldMk cId="0" sldId="272"/>
-        </pc:sldMkLst>
-        <pc:spChg chg="mod">
-          <ac:chgData name="Zonghua Gu" userId="9a7e1853e1951ef5" providerId="LiveId" clId="{CF1FAA12-072C-4ED5-BA76-0FFFAEFDB88A}" dt="2026-01-31T14:10:19.740" v="172" actId="21"/>
-          <ac:spMkLst>
-            <pc:docMk/>
-            <pc:sldMk cId="0" sldId="272"/>
-            <ac:spMk id="488" creationId="{00000000-0000-0000-0000-000000000000}"/>
-          </ac:spMkLst>
-        </pc:spChg>
-      </pc:sldChg>
-      <pc:sldChg chg="modSp del mod">
-        <pc:chgData name="Zonghua Gu" userId="9a7e1853e1951ef5" providerId="LiveId" clId="{CF1FAA12-072C-4ED5-BA76-0FFFAEFDB88A}" dt="2026-01-31T22:49:50.992" v="271" actId="47"/>
-        <pc:sldMkLst>
-          <pc:docMk/>
-          <pc:sldMk cId="0" sldId="273"/>
-        </pc:sldMkLst>
-        <pc:spChg chg="mod">
-          <ac:chgData name="Zonghua Gu" userId="9a7e1853e1951ef5" providerId="LiveId" clId="{CF1FAA12-072C-4ED5-BA76-0FFFAEFDB88A}" dt="2026-01-31T14:11:53.510" v="194" actId="20577"/>
-          <ac:spMkLst>
-            <pc:docMk/>
-            <pc:sldMk cId="0" sldId="273"/>
-            <ac:spMk id="511" creationId="{00000000-0000-0000-0000-000000000000}"/>
-          </ac:spMkLst>
-        </pc:spChg>
-        <pc:spChg chg="mod">
-          <ac:chgData name="Zonghua Gu" userId="9a7e1853e1951ef5" providerId="LiveId" clId="{CF1FAA12-072C-4ED5-BA76-0FFFAEFDB88A}" dt="2026-01-31T14:11:48.044" v="189" actId="1076"/>
-          <ac:spMkLst>
-            <pc:docMk/>
-            <pc:sldMk cId="0" sldId="273"/>
-            <ac:spMk id="512" creationId="{00000000-0000-0000-0000-000000000000}"/>
-          </ac:spMkLst>
-        </pc:spChg>
-        <pc:spChg chg="mod">
-          <ac:chgData name="Zonghua Gu" userId="9a7e1853e1951ef5" providerId="LiveId" clId="{CF1FAA12-072C-4ED5-BA76-0FFFAEFDB88A}" dt="2026-01-31T14:11:48.044" v="189" actId="1076"/>
-          <ac:spMkLst>
-            <pc:docMk/>
-            <pc:sldMk cId="0" sldId="273"/>
-            <ac:spMk id="513" creationId="{00000000-0000-0000-0000-000000000000}"/>
-          </ac:spMkLst>
-        </pc:spChg>
-        <pc:spChg chg="mod">
-          <ac:chgData name="Zonghua Gu" userId="9a7e1853e1951ef5" providerId="LiveId" clId="{CF1FAA12-072C-4ED5-BA76-0FFFAEFDB88A}" dt="2026-01-31T14:11:48.044" v="189" actId="1076"/>
-          <ac:spMkLst>
-            <pc:docMk/>
-            <pc:sldMk cId="0" sldId="273"/>
-            <ac:spMk id="518" creationId="{00000000-0000-0000-0000-000000000000}"/>
-          </ac:spMkLst>
-        </pc:spChg>
-        <pc:cxnChg chg="mod">
-          <ac:chgData name="Zonghua Gu" userId="9a7e1853e1951ef5" providerId="LiveId" clId="{CF1FAA12-072C-4ED5-BA76-0FFFAEFDB88A}" dt="2026-01-31T14:11:48.044" v="189" actId="1076"/>
-          <ac:cxnSpMkLst>
-            <pc:docMk/>
-            <pc:sldMk cId="0" sldId="273"/>
-            <ac:cxnSpMk id="517" creationId="{00000000-0000-0000-0000-000000000000}"/>
-          </ac:cxnSpMkLst>
-        </pc:cxnChg>
-        <pc:cxnChg chg="mod">
-          <ac:chgData name="Zonghua Gu" userId="9a7e1853e1951ef5" providerId="LiveId" clId="{CF1FAA12-072C-4ED5-BA76-0FFFAEFDB88A}" dt="2026-01-31T14:11:48.044" v="189" actId="1076"/>
-          <ac:cxnSpMkLst>
-            <pc:docMk/>
-            <pc:sldMk cId="0" sldId="273"/>
-            <ac:cxnSpMk id="520" creationId="{00000000-0000-0000-0000-000000000000}"/>
-          </ac:cxnSpMkLst>
-        </pc:cxnChg>
-        <pc:cxnChg chg="mod">
-          <ac:chgData name="Zonghua Gu" userId="9a7e1853e1951ef5" providerId="LiveId" clId="{CF1FAA12-072C-4ED5-BA76-0FFFAEFDB88A}" dt="2026-01-31T14:11:48.044" v="189" actId="1076"/>
-          <ac:cxnSpMkLst>
-            <pc:docMk/>
-            <pc:sldMk cId="0" sldId="273"/>
-            <ac:cxnSpMk id="522" creationId="{00000000-0000-0000-0000-000000000000}"/>
-          </ac:cxnSpMkLst>
-        </pc:cxnChg>
-        <pc:cxnChg chg="mod">
-          <ac:chgData name="Zonghua Gu" userId="9a7e1853e1951ef5" providerId="LiveId" clId="{CF1FAA12-072C-4ED5-BA76-0FFFAEFDB88A}" dt="2026-01-31T14:11:48.044" v="189" actId="1076"/>
-          <ac:cxnSpMkLst>
-            <pc:docMk/>
-            <pc:sldMk cId="0" sldId="273"/>
-            <ac:cxnSpMk id="523" creationId="{00000000-0000-0000-0000-000000000000}"/>
-          </ac:cxnSpMkLst>
-        </pc:cxnChg>
-        <pc:cxnChg chg="mod">
-          <ac:chgData name="Zonghua Gu" userId="9a7e1853e1951ef5" providerId="LiveId" clId="{CF1FAA12-072C-4ED5-BA76-0FFFAEFDB88A}" dt="2026-01-31T14:11:48.044" v="189" actId="1076"/>
-          <ac:cxnSpMkLst>
-            <pc:docMk/>
-            <pc:sldMk cId="0" sldId="273"/>
-            <ac:cxnSpMk id="524" creationId="{00000000-0000-0000-0000-000000000000}"/>
-          </ac:cxnSpMkLst>
-        </pc:cxnChg>
-        <pc:cxnChg chg="mod">
-          <ac:chgData name="Zonghua Gu" userId="9a7e1853e1951ef5" providerId="LiveId" clId="{CF1FAA12-072C-4ED5-BA76-0FFFAEFDB88A}" dt="2026-01-31T14:11:48.044" v="189" actId="1076"/>
-          <ac:cxnSpMkLst>
-            <pc:docMk/>
-            <pc:sldMk cId="0" sldId="273"/>
-            <ac:cxnSpMk id="525" creationId="{00000000-0000-0000-0000-000000000000}"/>
-          </ac:cxnSpMkLst>
-        </pc:cxnChg>
-        <pc:cxnChg chg="mod">
-          <ac:chgData name="Zonghua Gu" userId="9a7e1853e1951ef5" providerId="LiveId" clId="{CF1FAA12-072C-4ED5-BA76-0FFFAEFDB88A}" dt="2026-01-31T14:11:48.044" v="189" actId="1076"/>
-          <ac:cxnSpMkLst>
-            <pc:docMk/>
-            <pc:sldMk cId="0" sldId="273"/>
-            <ac:cxnSpMk id="526" creationId="{00000000-0000-0000-0000-000000000000}"/>
-          </ac:cxnSpMkLst>
-        </pc:cxnChg>
-      </pc:sldChg>
-      <pc:sldChg chg="modSp del mod">
-        <pc:chgData name="Zonghua Gu" userId="9a7e1853e1951ef5" providerId="LiveId" clId="{CF1FAA12-072C-4ED5-BA76-0FFFAEFDB88A}" dt="2026-01-31T14:11:56.053" v="195" actId="47"/>
-        <pc:sldMkLst>
-          <pc:docMk/>
-          <pc:sldMk cId="0" sldId="274"/>
-        </pc:sldMkLst>
-        <pc:spChg chg="mod">
-          <ac:chgData name="Zonghua Gu" userId="9a7e1853e1951ef5" providerId="LiveId" clId="{CF1FAA12-072C-4ED5-BA76-0FFFAEFDB88A}" dt="2026-01-31T14:11:11.610" v="181" actId="21"/>
-          <ac:spMkLst>
-            <pc:docMk/>
-            <pc:sldMk cId="0" sldId="274"/>
-            <ac:spMk id="532" creationId="{00000000-0000-0000-0000-000000000000}"/>
-          </ac:spMkLst>
-        </pc:spChg>
-      </pc:sldChg>
-      <pc:sldChg chg="del">
-        <pc:chgData name="Zonghua Gu" userId="9a7e1853e1951ef5" providerId="LiveId" clId="{CF1FAA12-072C-4ED5-BA76-0FFFAEFDB88A}" dt="2026-01-31T22:49:50.992" v="271" actId="47"/>
-        <pc:sldMkLst>
-          <pc:docMk/>
-          <pc:sldMk cId="0" sldId="275"/>
-        </pc:sldMkLst>
-      </pc:sldChg>
-      <pc:sldChg chg="modSp del modNotes">
-        <pc:chgData name="Zonghua Gu" userId="9a7e1853e1951ef5" providerId="LiveId" clId="{CF1FAA12-072C-4ED5-BA76-0FFFAEFDB88A}" dt="2026-01-31T22:49:50.992" v="271" actId="47"/>
-        <pc:sldMkLst>
-          <pc:docMk/>
-          <pc:sldMk cId="0" sldId="276"/>
-        </pc:sldMkLst>
-        <pc:spChg chg="mod">
-          <ac:chgData name="Zonghua Gu" userId="9a7e1853e1951ef5" providerId="LiveId" clId="{CF1FAA12-072C-4ED5-BA76-0FFFAEFDB88A}" dt="2026-01-31T14:13:13.659" v="199"/>
-          <ac:spMkLst>
-            <pc:docMk/>
-            <pc:sldMk cId="0" sldId="276"/>
-            <ac:spMk id="562" creationId="{00000000-0000-0000-0000-000000000000}"/>
-          </ac:spMkLst>
-        </pc:spChg>
-      </pc:sldChg>
-      <pc:sldChg chg="modSp del mod">
-        <pc:chgData name="Zonghua Gu" userId="9a7e1853e1951ef5" providerId="LiveId" clId="{CF1FAA12-072C-4ED5-BA76-0FFFAEFDB88A}" dt="2026-01-31T22:49:50.992" v="271" actId="47"/>
-        <pc:sldMkLst>
-          <pc:docMk/>
-          <pc:sldMk cId="0" sldId="277"/>
-        </pc:sldMkLst>
-        <pc:spChg chg="mod">
-          <ac:chgData name="Zonghua Gu" userId="9a7e1853e1951ef5" providerId="LiveId" clId="{CF1FAA12-072C-4ED5-BA76-0FFFAEFDB88A}" dt="2026-01-31T14:12:29.988" v="196" actId="21"/>
-          <ac:spMkLst>
-            <pc:docMk/>
-            <pc:sldMk cId="0" sldId="277"/>
-            <ac:spMk id="568" creationId="{00000000-0000-0000-0000-000000000000}"/>
-          </ac:spMkLst>
-        </pc:spChg>
-      </pc:sldChg>
-      <pc:sldChg chg="del">
-        <pc:chgData name="Zonghua Gu" userId="9a7e1853e1951ef5" providerId="LiveId" clId="{CF1FAA12-072C-4ED5-BA76-0FFFAEFDB88A}" dt="2026-01-31T22:49:50.992" v="271" actId="47"/>
-        <pc:sldMkLst>
-          <pc:docMk/>
-          <pc:sldMk cId="0" sldId="278"/>
-        </pc:sldMkLst>
-      </pc:sldChg>
-      <pc:sldChg chg="modSp del mod modNotesTx">
-        <pc:chgData name="Zonghua Gu" userId="9a7e1853e1951ef5" providerId="LiveId" clId="{CF1FAA12-072C-4ED5-BA76-0FFFAEFDB88A}" dt="2026-01-31T22:49:50.992" v="271" actId="47"/>
-        <pc:sldMkLst>
-          <pc:docMk/>
-          <pc:sldMk cId="0" sldId="279"/>
-        </pc:sldMkLst>
-        <pc:spChg chg="mod">
-          <ac:chgData name="Zonghua Gu" userId="9a7e1853e1951ef5" providerId="LiveId" clId="{CF1FAA12-072C-4ED5-BA76-0FFFAEFDB88A}" dt="2026-01-31T14:13:00.152" v="197" actId="21"/>
-          <ac:spMkLst>
-            <pc:docMk/>
-            <pc:sldMk cId="0" sldId="279"/>
-            <ac:spMk id="580" creationId="{00000000-0000-0000-0000-000000000000}"/>
-          </ac:spMkLst>
-        </pc:spChg>
-      </pc:sldChg>
-      <pc:sldChg chg="modSp del modNotes">
-        <pc:chgData name="Zonghua Gu" userId="9a7e1853e1951ef5" providerId="LiveId" clId="{CF1FAA12-072C-4ED5-BA76-0FFFAEFDB88A}" dt="2026-01-31T22:49:50.992" v="271" actId="47"/>
-        <pc:sldMkLst>
-          <pc:docMk/>
-          <pc:sldMk cId="0" sldId="280"/>
-        </pc:sldMkLst>
-        <pc:spChg chg="mod">
-          <ac:chgData name="Zonghua Gu" userId="9a7e1853e1951ef5" providerId="LiveId" clId="{CF1FAA12-072C-4ED5-BA76-0FFFAEFDB88A}" dt="2026-01-31T14:13:13.659" v="199"/>
-          <ac:spMkLst>
-            <pc:docMk/>
-            <pc:sldMk cId="0" sldId="280"/>
-            <ac:spMk id="587" creationId="{00000000-0000-0000-0000-000000000000}"/>
-          </ac:spMkLst>
-        </pc:spChg>
-      </pc:sldChg>
-      <pc:sldChg chg="delSp modSp del mod">
-        <pc:chgData name="Zonghua Gu" userId="9a7e1853e1951ef5" providerId="LiveId" clId="{CF1FAA12-072C-4ED5-BA76-0FFFAEFDB88A}" dt="2026-01-31T22:49:50.992" v="271" actId="47"/>
-        <pc:sldMkLst>
-          <pc:docMk/>
-          <pc:sldMk cId="0" sldId="281"/>
-        </pc:sldMkLst>
-        <pc:spChg chg="mod">
-          <ac:chgData name="Zonghua Gu" userId="9a7e1853e1951ef5" providerId="LiveId" clId="{CF1FAA12-072C-4ED5-BA76-0FFFAEFDB88A}" dt="2026-01-31T14:14:00.917" v="212"/>
-          <ac:spMkLst>
-            <pc:docMk/>
-            <pc:sldMk cId="0" sldId="281"/>
-            <ac:spMk id="592" creationId="{00000000-0000-0000-0000-000000000000}"/>
-          </ac:spMkLst>
-        </pc:spChg>
-        <pc:spChg chg="mod">
-          <ac:chgData name="Zonghua Gu" userId="9a7e1853e1951ef5" providerId="LiveId" clId="{CF1FAA12-072C-4ED5-BA76-0FFFAEFDB88A}" dt="2026-01-31T14:13:55.157" v="210" actId="20577"/>
-          <ac:spMkLst>
-            <pc:docMk/>
-            <pc:sldMk cId="0" sldId="281"/>
-            <ac:spMk id="593" creationId="{00000000-0000-0000-0000-000000000000}"/>
-          </ac:spMkLst>
-        </pc:spChg>
-        <pc:spChg chg="del">
-          <ac:chgData name="Zonghua Gu" userId="9a7e1853e1951ef5" providerId="LiveId" clId="{CF1FAA12-072C-4ED5-BA76-0FFFAEFDB88A}" dt="2026-01-31T14:13:39.244" v="205" actId="478"/>
-          <ac:spMkLst>
-            <pc:docMk/>
-            <pc:sldMk cId="0" sldId="281"/>
-            <ac:spMk id="596" creationId="{00000000-0000-0000-0000-000000000000}"/>
-          </ac:spMkLst>
-        </pc:spChg>
-        <pc:picChg chg="del">
-          <ac:chgData name="Zonghua Gu" userId="9a7e1853e1951ef5" providerId="LiveId" clId="{CF1FAA12-072C-4ED5-BA76-0FFFAEFDB88A}" dt="2026-01-31T14:13:39.244" v="205" actId="478"/>
-          <ac:picMkLst>
-            <pc:docMk/>
-            <pc:sldMk cId="0" sldId="281"/>
-            <ac:picMk id="594" creationId="{00000000-0000-0000-0000-000000000000}"/>
-          </ac:picMkLst>
-        </pc:picChg>
-        <pc:picChg chg="del">
-          <ac:chgData name="Zonghua Gu" userId="9a7e1853e1951ef5" providerId="LiveId" clId="{CF1FAA12-072C-4ED5-BA76-0FFFAEFDB88A}" dt="2026-01-31T14:13:39.244" v="205" actId="478"/>
-          <ac:picMkLst>
-            <pc:docMk/>
-            <pc:sldMk cId="0" sldId="281"/>
-            <ac:picMk id="595" creationId="{00000000-0000-0000-0000-000000000000}"/>
-          </ac:picMkLst>
-        </pc:picChg>
-      </pc:sldChg>
-      <pc:sldChg chg="modSp del mod">
-        <pc:chgData name="Zonghua Gu" userId="9a7e1853e1951ef5" providerId="LiveId" clId="{CF1FAA12-072C-4ED5-BA76-0FFFAEFDB88A}" dt="2026-01-31T14:14:02.563" v="213" actId="47"/>
-        <pc:sldMkLst>
-          <pc:docMk/>
-          <pc:sldMk cId="0" sldId="282"/>
-        </pc:sldMkLst>
-        <pc:spChg chg="mod">
-          <ac:chgData name="Zonghua Gu" userId="9a7e1853e1951ef5" providerId="LiveId" clId="{CF1FAA12-072C-4ED5-BA76-0FFFAEFDB88A}" dt="2026-01-31T14:13:58.872" v="211" actId="21"/>
-          <ac:spMkLst>
-            <pc:docMk/>
-            <pc:sldMk cId="0" sldId="282"/>
-            <ac:spMk id="601" creationId="{00000000-0000-0000-0000-000000000000}"/>
-          </ac:spMkLst>
-        </pc:spChg>
-        <pc:spChg chg="mod">
-          <ac:chgData name="Zonghua Gu" userId="9a7e1853e1951ef5" providerId="LiveId" clId="{CF1FAA12-072C-4ED5-BA76-0FFFAEFDB88A}" dt="2026-01-31T14:13:49.289" v="206" actId="21"/>
-          <ac:spMkLst>
-            <pc:docMk/>
-            <pc:sldMk cId="0" sldId="282"/>
-            <ac:spMk id="602" creationId="{00000000-0000-0000-0000-000000000000}"/>
-          </ac:spMkLst>
-        </pc:spChg>
-      </pc:sldChg>
-      <pc:sldChg chg="del">
-        <pc:chgData name="Zonghua Gu" userId="9a7e1853e1951ef5" providerId="LiveId" clId="{CF1FAA12-072C-4ED5-BA76-0FFFAEFDB88A}" dt="2026-01-31T22:49:50.992" v="271" actId="47"/>
-        <pc:sldMkLst>
-          <pc:docMk/>
-          <pc:sldMk cId="0" sldId="283"/>
-        </pc:sldMkLst>
-      </pc:sldChg>
-      <pc:sldChg chg="del">
-        <pc:chgData name="Zonghua Gu" userId="9a7e1853e1951ef5" providerId="LiveId" clId="{CF1FAA12-072C-4ED5-BA76-0FFFAEFDB88A}" dt="2026-01-31T22:49:50.992" v="271" actId="47"/>
-        <pc:sldMkLst>
-          <pc:docMk/>
-          <pc:sldMk cId="0" sldId="284"/>
-        </pc:sldMkLst>
-      </pc:sldChg>
-      <pc:sldChg chg="addSp modSp add del mod">
-        <pc:chgData name="Zonghua Gu" userId="9a7e1853e1951ef5" providerId="LiveId" clId="{CF1FAA12-072C-4ED5-BA76-0FFFAEFDB88A}" dt="2026-01-31T23:38:14.101" v="432" actId="27636"/>
-        <pc:sldMkLst>
-          <pc:docMk/>
-          <pc:sldMk cId="0" sldId="285"/>
-        </pc:sldMkLst>
-        <pc:spChg chg="mod">
-          <ac:chgData name="Zonghua Gu" userId="9a7e1853e1951ef5" providerId="LiveId" clId="{CF1FAA12-072C-4ED5-BA76-0FFFAEFDB88A}" dt="2026-01-31T14:16:18.949" v="214" actId="207"/>
-          <ac:spMkLst>
-            <pc:docMk/>
-            <pc:sldMk cId="0" sldId="285"/>
-            <ac:spMk id="643" creationId="{00000000-0000-0000-0000-000000000000}"/>
-          </ac:spMkLst>
-        </pc:spChg>
-        <pc:spChg chg="mod">
-          <ac:chgData name="Zonghua Gu" userId="9a7e1853e1951ef5" providerId="LiveId" clId="{CF1FAA12-072C-4ED5-BA76-0FFFAEFDB88A}" dt="2026-01-31T23:31:13.957" v="284" actId="20577"/>
-          <ac:spMkLst>
-            <pc:docMk/>
-            <pc:sldMk cId="0" sldId="285"/>
-            <ac:spMk id="1821" creationId="{00000000-0000-0000-0000-000000000000}"/>
-          </ac:spMkLst>
-        </pc:spChg>
-        <pc:spChg chg="mod">
-          <ac:chgData name="Zonghua Gu" userId="9a7e1853e1951ef5" providerId="LiveId" clId="{CF1FAA12-072C-4ED5-BA76-0FFFAEFDB88A}" dt="2026-01-31T23:38:14.101" v="432" actId="27636"/>
-          <ac:spMkLst>
-            <pc:docMk/>
-            <pc:sldMk cId="0" sldId="285"/>
-            <ac:spMk id="1822" creationId="{00000000-0000-0000-0000-000000000000}"/>
-          </ac:spMkLst>
-        </pc:spChg>
-        <pc:picChg chg="add mod">
-          <ac:chgData name="Zonghua Gu" userId="9a7e1853e1951ef5" providerId="LiveId" clId="{CF1FAA12-072C-4ED5-BA76-0FFFAEFDB88A}" dt="2026-01-31T23:33:00.644" v="302" actId="1076"/>
-          <ac:picMkLst>
-            <pc:docMk/>
-            <pc:sldMk cId="0" sldId="285"/>
-            <ac:picMk id="4" creationId="{C8A6AF53-1090-46BF-4B97-4DD6AA47EBD0}"/>
-          </ac:picMkLst>
-        </pc:picChg>
-      </pc:sldChg>
-      <pc:sldChg chg="del">
-        <pc:chgData name="Zonghua Gu" userId="9a7e1853e1951ef5" providerId="LiveId" clId="{CF1FAA12-072C-4ED5-BA76-0FFFAEFDB88A}" dt="2026-01-31T22:49:50.992" v="271" actId="47"/>
-        <pc:sldMkLst>
-          <pc:docMk/>
-          <pc:sldMk cId="0" sldId="286"/>
-        </pc:sldMkLst>
-      </pc:sldChg>
-      <pc:sldChg chg="modSp add mod">
-        <pc:chgData name="Zonghua Gu" userId="9a7e1853e1951ef5" providerId="LiveId" clId="{CF1FAA12-072C-4ED5-BA76-0FFFAEFDB88A}" dt="2026-01-31T23:38:34.972" v="445" actId="1076"/>
+      <pc:sldChg chg="addSp delSp modSp mod">
+        <pc:chgData name="Zonghua Gu" userId="9a7e1853e1951ef5" providerId="LiveId" clId="{CF1FAA12-072C-4ED5-BA76-0FFFAEFDB88A}" dt="2026-03-26T19:58:37.719" v="710" actId="478"/>
         <pc:sldMkLst>
           <pc:docMk/>
           <pc:sldMk cId="20097595" sldId="286"/>
         </pc:sldMkLst>
         <pc:spChg chg="mod">
-          <ac:chgData name="Zonghua Gu" userId="9a7e1853e1951ef5" providerId="LiveId" clId="{CF1FAA12-072C-4ED5-BA76-0FFFAEFDB88A}" dt="2026-01-31T23:38:23.032" v="440" actId="20577"/>
+          <ac:chgData name="Zonghua Gu" userId="9a7e1853e1951ef5" providerId="LiveId" clId="{CF1FAA12-072C-4ED5-BA76-0FFFAEFDB88A}" dt="2026-03-26T19:58:17.831" v="696" actId="1076"/>
           <ac:spMkLst>
             <pc:docMk/>
             <pc:sldMk cId="20097595" sldId="286"/>
-            <ac:spMk id="1821" creationId="{CDA0B8BE-8F05-8FD9-7E4C-2A45D90520DE}"/>
+            <ac:spMk id="3" creationId="{47247A74-E8E4-1678-ACB8-F868F0268B9C}"/>
+          </ac:spMkLst>
+        </pc:spChg>
+        <pc:spChg chg="add mod">
+          <ac:chgData name="Zonghua Gu" userId="9a7e1853e1951ef5" providerId="LiveId" clId="{CF1FAA12-072C-4ED5-BA76-0FFFAEFDB88A}" dt="2026-03-26T19:58:27.582" v="708" actId="1076"/>
+          <ac:spMkLst>
+            <pc:docMk/>
+            <pc:sldMk cId="20097595" sldId="286"/>
+            <ac:spMk id="6" creationId="{7C6E464A-5322-C93E-0A45-DF2222AC0560}"/>
+          </ac:spMkLst>
+        </pc:spChg>
+        <pc:spChg chg="add del mod">
+          <ac:chgData name="Zonghua Gu" userId="9a7e1853e1951ef5" providerId="LiveId" clId="{CF1FAA12-072C-4ED5-BA76-0FFFAEFDB88A}" dt="2026-03-26T19:58:37.719" v="710" actId="478"/>
+          <ac:spMkLst>
+            <pc:docMk/>
+            <pc:sldMk cId="20097595" sldId="286"/>
+            <ac:spMk id="7" creationId="{1E86531A-21CF-BEDF-7927-179610763D76}"/>
+          </ac:spMkLst>
+        </pc:spChg>
+      </pc:sldChg>
+      <pc:sldChg chg="addSp modSp mod">
+        <pc:chgData name="Zonghua Gu" userId="9a7e1853e1951ef5" providerId="LiveId" clId="{CF1FAA12-072C-4ED5-BA76-0FFFAEFDB88A}" dt="2026-03-26T21:27:05.124" v="723" actId="20577"/>
+        <pc:sldMkLst>
+          <pc:docMk/>
+          <pc:sldMk cId="2594749675" sldId="287"/>
+        </pc:sldMkLst>
+        <pc:spChg chg="mod">
+          <ac:chgData name="Zonghua Gu" userId="9a7e1853e1951ef5" providerId="LiveId" clId="{CF1FAA12-072C-4ED5-BA76-0FFFAEFDB88A}" dt="2026-03-26T19:40:55.954" v="640" actId="20577"/>
+          <ac:spMkLst>
+            <pc:docMk/>
+            <pc:sldMk cId="2594749675" sldId="287"/>
+            <ac:spMk id="2" creationId="{EB247837-37E5-0024-8F58-B324FB7B590D}"/>
           </ac:spMkLst>
         </pc:spChg>
         <pc:spChg chg="mod">
-          <ac:chgData name="Zonghua Gu" userId="9a7e1853e1951ef5" providerId="LiveId" clId="{CF1FAA12-072C-4ED5-BA76-0FFFAEFDB88A}" dt="2026-01-31T23:38:34.972" v="445" actId="1076"/>
+          <ac:chgData name="Zonghua Gu" userId="9a7e1853e1951ef5" providerId="LiveId" clId="{CF1FAA12-072C-4ED5-BA76-0FFFAEFDB88A}" dt="2026-03-26T21:27:05.124" v="723" actId="20577"/>
           <ac:spMkLst>
             <pc:docMk/>
-            <pc:sldMk cId="20097595" sldId="286"/>
-            <ac:spMk id="1822" creationId="{392BB831-FAA9-FFBC-15AC-4267B998AD10}"/>
+            <pc:sldMk cId="2594749675" sldId="287"/>
+            <ac:spMk id="3" creationId="{3EF2E7EA-408D-6358-0351-525885CB7288}"/>
           </ac:spMkLst>
         </pc:spChg>
-        <pc:picChg chg="mod">
-          <ac:chgData name="Zonghua Gu" userId="9a7e1853e1951ef5" providerId="LiveId" clId="{CF1FAA12-072C-4ED5-BA76-0FFFAEFDB88A}" dt="2026-01-31T23:38:26.861" v="442" actId="14100"/>
+        <pc:spChg chg="add">
+          <ac:chgData name="Zonghua Gu" userId="9a7e1853e1951ef5" providerId="LiveId" clId="{CF1FAA12-072C-4ED5-BA76-0FFFAEFDB88A}" dt="2026-03-26T19:45:10.977" v="645"/>
+          <ac:spMkLst>
+            <pc:docMk/>
+            <pc:sldMk cId="2594749675" sldId="287"/>
+            <ac:spMk id="7" creationId="{3D54EC34-A4B3-75EF-9344-781F00807269}"/>
+          </ac:spMkLst>
+        </pc:spChg>
+        <pc:spChg chg="add">
+          <ac:chgData name="Zonghua Gu" userId="9a7e1853e1951ef5" providerId="LiveId" clId="{CF1FAA12-072C-4ED5-BA76-0FFFAEFDB88A}" dt="2026-03-26T19:45:13.253" v="646"/>
+          <ac:spMkLst>
+            <pc:docMk/>
+            <pc:sldMk cId="2594749675" sldId="287"/>
+            <ac:spMk id="8" creationId="{D71CD8A7-4B38-0BE2-E1A9-CDB09217C862}"/>
+          </ac:spMkLst>
+        </pc:spChg>
+      </pc:sldChg>
+      <pc:sldChg chg="modSp">
+        <pc:chgData name="Zonghua Gu" userId="9a7e1853e1951ef5" providerId="LiveId" clId="{CF1FAA12-072C-4ED5-BA76-0FFFAEFDB88A}" dt="2026-03-26T20:02:35.339" v="712"/>
+        <pc:sldMkLst>
+          <pc:docMk/>
+          <pc:sldMk cId="1178719196" sldId="288"/>
+        </pc:sldMkLst>
+        <pc:spChg chg="mod">
+          <ac:chgData name="Zonghua Gu" userId="9a7e1853e1951ef5" providerId="LiveId" clId="{CF1FAA12-072C-4ED5-BA76-0FFFAEFDB88A}" dt="2026-03-26T20:02:35.339" v="712"/>
+          <ac:spMkLst>
+            <pc:docMk/>
+            <pc:sldMk cId="1178719196" sldId="288"/>
+            <ac:spMk id="2" creationId="{86E1E8E3-198B-0104-CACF-8A198A9913D8}"/>
+          </ac:spMkLst>
+        </pc:spChg>
+      </pc:sldChg>
+      <pc:sldChg chg="addSp modSp new mod">
+        <pc:chgData name="Zonghua Gu" userId="9a7e1853e1951ef5" providerId="LiveId" clId="{CF1FAA12-072C-4ED5-BA76-0FFFAEFDB88A}" dt="2026-03-26T20:02:32.480" v="711"/>
+        <pc:sldMkLst>
+          <pc:docMk/>
+          <pc:sldMk cId="2089477044" sldId="289"/>
+        </pc:sldMkLst>
+        <pc:spChg chg="mod">
+          <ac:chgData name="Zonghua Gu" userId="9a7e1853e1951ef5" providerId="LiveId" clId="{CF1FAA12-072C-4ED5-BA76-0FFFAEFDB88A}" dt="2026-03-26T20:02:32.480" v="711"/>
+          <ac:spMkLst>
+            <pc:docMk/>
+            <pc:sldMk cId="2089477044" sldId="289"/>
+            <ac:spMk id="2" creationId="{B115100A-DFFF-500F-E553-C1CA2F507822}"/>
+          </ac:spMkLst>
+        </pc:spChg>
+        <pc:spChg chg="mod">
+          <ac:chgData name="Zonghua Gu" userId="9a7e1853e1951ef5" providerId="LiveId" clId="{CF1FAA12-072C-4ED5-BA76-0FFFAEFDB88A}" dt="2026-03-26T19:51:43.563" v="694" actId="14100"/>
+          <ac:spMkLst>
+            <pc:docMk/>
+            <pc:sldMk cId="2089477044" sldId="289"/>
+            <ac:spMk id="3" creationId="{F5EA2728-D512-2120-FCEF-07325C84B194}"/>
+          </ac:spMkLst>
+        </pc:spChg>
+        <pc:spChg chg="add mod">
+          <ac:chgData name="Zonghua Gu" userId="9a7e1853e1951ef5" providerId="LiveId" clId="{CF1FAA12-072C-4ED5-BA76-0FFFAEFDB88A}" dt="2026-03-26T19:49:45.043" v="660"/>
+          <ac:spMkLst>
+            <pc:docMk/>
+            <pc:sldMk cId="2089477044" sldId="289"/>
+            <ac:spMk id="5" creationId="{2962E189-AE68-2144-6922-8C82685A7224}"/>
+          </ac:spMkLst>
+        </pc:spChg>
+        <pc:spChg chg="add mod">
+          <ac:chgData name="Zonghua Gu" userId="9a7e1853e1951ef5" providerId="LiveId" clId="{CF1FAA12-072C-4ED5-BA76-0FFFAEFDB88A}" dt="2026-03-26T19:49:45.043" v="660"/>
+          <ac:spMkLst>
+            <pc:docMk/>
+            <pc:sldMk cId="2089477044" sldId="289"/>
+            <ac:spMk id="6" creationId="{C3C2A4D2-CF08-12B1-54DF-57335316933F}"/>
+          </ac:spMkLst>
+        </pc:spChg>
+        <pc:picChg chg="add mod">
+          <ac:chgData name="Zonghua Gu" userId="9a7e1853e1951ef5" providerId="LiveId" clId="{CF1FAA12-072C-4ED5-BA76-0FFFAEFDB88A}" dt="2026-03-26T19:49:45.043" v="660"/>
           <ac:picMkLst>
             <pc:docMk/>
-            <pc:sldMk cId="20097595" sldId="286"/>
-            <ac:picMk id="4" creationId="{0B83E221-D08F-CCE5-933A-BD9825CE08C5}"/>
+            <pc:sldMk cId="2089477044" sldId="289"/>
+            <ac:picMk id="4" creationId="{ADDDA921-A51A-2003-DE2F-9AFEA87A8FEA}"/>
           </ac:picMkLst>
         </pc:picChg>
       </pc:sldChg>
-      <pc:sldChg chg="del">
-        <pc:chgData name="Zonghua Gu" userId="9a7e1853e1951ef5" providerId="LiveId" clId="{CF1FAA12-072C-4ED5-BA76-0FFFAEFDB88A}" dt="2026-01-31T22:49:50.992" v="271" actId="47"/>
-        <pc:sldMkLst>
-          <pc:docMk/>
-          <pc:sldMk cId="0" sldId="287"/>
-        </pc:sldMkLst>
-      </pc:sldChg>
-      <pc:sldChg chg="del">
-        <pc:chgData name="Zonghua Gu" userId="9a7e1853e1951ef5" providerId="LiveId" clId="{CF1FAA12-072C-4ED5-BA76-0FFFAEFDB88A}" dt="2026-01-31T22:49:50.992" v="271" actId="47"/>
-        <pc:sldMkLst>
-          <pc:docMk/>
-          <pc:sldMk cId="0" sldId="288"/>
-        </pc:sldMkLst>
-      </pc:sldChg>
-      <pc:sldChg chg="del">
-        <pc:chgData name="Zonghua Gu" userId="9a7e1853e1951ef5" providerId="LiveId" clId="{CF1FAA12-072C-4ED5-BA76-0FFFAEFDB88A}" dt="2026-01-31T22:49:50.992" v="271" actId="47"/>
-        <pc:sldMkLst>
-          <pc:docMk/>
-          <pc:sldMk cId="0" sldId="289"/>
-        </pc:sldMkLst>
-      </pc:sldChg>
-      <pc:sldChg chg="del">
-        <pc:chgData name="Zonghua Gu" userId="9a7e1853e1951ef5" providerId="LiveId" clId="{CF1FAA12-072C-4ED5-BA76-0FFFAEFDB88A}" dt="2026-01-31T22:49:50.992" v="271" actId="47"/>
-        <pc:sldMkLst>
-          <pc:docMk/>
-          <pc:sldMk cId="0" sldId="290"/>
-        </pc:sldMkLst>
-      </pc:sldChg>
-      <pc:sldChg chg="del">
-        <pc:chgData name="Zonghua Gu" userId="9a7e1853e1951ef5" providerId="LiveId" clId="{CF1FAA12-072C-4ED5-BA76-0FFFAEFDB88A}" dt="2026-01-31T22:49:50.992" v="271" actId="47"/>
-        <pc:sldMkLst>
-          <pc:docMk/>
-          <pc:sldMk cId="0" sldId="291"/>
-        </pc:sldMkLst>
-      </pc:sldChg>
-      <pc:sldChg chg="del">
-        <pc:chgData name="Zonghua Gu" userId="9a7e1853e1951ef5" providerId="LiveId" clId="{CF1FAA12-072C-4ED5-BA76-0FFFAEFDB88A}" dt="2026-01-31T22:49:50.992" v="271" actId="47"/>
-        <pc:sldMkLst>
-          <pc:docMk/>
-          <pc:sldMk cId="0" sldId="292"/>
-        </pc:sldMkLst>
-      </pc:sldChg>
-      <pc:sldChg chg="modSp del mod">
-        <pc:chgData name="Zonghua Gu" userId="9a7e1853e1951ef5" providerId="LiveId" clId="{CF1FAA12-072C-4ED5-BA76-0FFFAEFDB88A}" dt="2026-01-31T22:49:50.992" v="271" actId="47"/>
-        <pc:sldMkLst>
-          <pc:docMk/>
-          <pc:sldMk cId="0" sldId="293"/>
-        </pc:sldMkLst>
-        <pc:spChg chg="mod">
-          <ac:chgData name="Zonghua Gu" userId="9a7e1853e1951ef5" providerId="LiveId" clId="{CF1FAA12-072C-4ED5-BA76-0FFFAEFDB88A}" dt="2026-01-31T14:19:08.258" v="227" actId="20577"/>
-          <ac:spMkLst>
-            <pc:docMk/>
-            <pc:sldMk cId="0" sldId="293"/>
-            <ac:spMk id="784" creationId="{00000000-0000-0000-0000-000000000000}"/>
-          </ac:spMkLst>
-        </pc:spChg>
-        <pc:spChg chg="mod">
-          <ac:chgData name="Zonghua Gu" userId="9a7e1853e1951ef5" providerId="LiveId" clId="{CF1FAA12-072C-4ED5-BA76-0FFFAEFDB88A}" dt="2026-01-31T14:19:24.058" v="229"/>
-          <ac:spMkLst>
-            <pc:docMk/>
-            <pc:sldMk cId="0" sldId="293"/>
-            <ac:spMk id="786" creationId="{00000000-0000-0000-0000-000000000000}"/>
-          </ac:spMkLst>
-        </pc:spChg>
-      </pc:sldChg>
-      <pc:sldChg chg="del">
-        <pc:chgData name="Zonghua Gu" userId="9a7e1853e1951ef5" providerId="LiveId" clId="{CF1FAA12-072C-4ED5-BA76-0FFFAEFDB88A}" dt="2026-01-31T22:49:50.992" v="271" actId="47"/>
-        <pc:sldMkLst>
-          <pc:docMk/>
-          <pc:sldMk cId="0" sldId="294"/>
-        </pc:sldMkLst>
-      </pc:sldChg>
-      <pc:sldChg chg="del">
-        <pc:chgData name="Zonghua Gu" userId="9a7e1853e1951ef5" providerId="LiveId" clId="{CF1FAA12-072C-4ED5-BA76-0FFFAEFDB88A}" dt="2026-01-31T22:49:50.992" v="271" actId="47"/>
-        <pc:sldMkLst>
-          <pc:docMk/>
-          <pc:sldMk cId="0" sldId="295"/>
-        </pc:sldMkLst>
-      </pc:sldChg>
-      <pc:sldChg chg="del">
-        <pc:chgData name="Zonghua Gu" userId="9a7e1853e1951ef5" providerId="LiveId" clId="{CF1FAA12-072C-4ED5-BA76-0FFFAEFDB88A}" dt="2026-01-31T22:49:50.992" v="271" actId="47"/>
-        <pc:sldMkLst>
-          <pc:docMk/>
-          <pc:sldMk cId="0" sldId="296"/>
-        </pc:sldMkLst>
-      </pc:sldChg>
-      <pc:sldChg chg="del">
-        <pc:chgData name="Zonghua Gu" userId="9a7e1853e1951ef5" providerId="LiveId" clId="{CF1FAA12-072C-4ED5-BA76-0FFFAEFDB88A}" dt="2026-01-31T22:49:50.992" v="271" actId="47"/>
-        <pc:sldMkLst>
-          <pc:docMk/>
-          <pc:sldMk cId="0" sldId="297"/>
-        </pc:sldMkLst>
-      </pc:sldChg>
-      <pc:sldChg chg="del">
-        <pc:chgData name="Zonghua Gu" userId="9a7e1853e1951ef5" providerId="LiveId" clId="{CF1FAA12-072C-4ED5-BA76-0FFFAEFDB88A}" dt="2026-01-31T22:49:50.992" v="271" actId="47"/>
-        <pc:sldMkLst>
-          <pc:docMk/>
-          <pc:sldMk cId="0" sldId="298"/>
-        </pc:sldMkLst>
-      </pc:sldChg>
-      <pc:sldChg chg="del">
-        <pc:chgData name="Zonghua Gu" userId="9a7e1853e1951ef5" providerId="LiveId" clId="{CF1FAA12-072C-4ED5-BA76-0FFFAEFDB88A}" dt="2026-01-31T22:49:50.992" v="271" actId="47"/>
-        <pc:sldMkLst>
-          <pc:docMk/>
-          <pc:sldMk cId="0" sldId="299"/>
-        </pc:sldMkLst>
-      </pc:sldChg>
-      <pc:sldChg chg="modSp del modNotes">
-        <pc:chgData name="Zonghua Gu" userId="9a7e1853e1951ef5" providerId="LiveId" clId="{CF1FAA12-072C-4ED5-BA76-0FFFAEFDB88A}" dt="2026-01-31T22:49:50.992" v="271" actId="47"/>
-        <pc:sldMkLst>
-          <pc:docMk/>
-          <pc:sldMk cId="0" sldId="300"/>
-        </pc:sldMkLst>
-        <pc:spChg chg="mod">
-          <ac:chgData name="Zonghua Gu" userId="9a7e1853e1951ef5" providerId="LiveId" clId="{CF1FAA12-072C-4ED5-BA76-0FFFAEFDB88A}" dt="2026-01-31T14:13:13.659" v="199"/>
-          <ac:spMkLst>
-            <pc:docMk/>
-            <pc:sldMk cId="0" sldId="300"/>
-            <ac:spMk id="887" creationId="{00000000-0000-0000-0000-000000000000}"/>
-          </ac:spMkLst>
-        </pc:spChg>
-      </pc:sldChg>
-      <pc:sldChg chg="modSp del mod">
-        <pc:chgData name="Zonghua Gu" userId="9a7e1853e1951ef5" providerId="LiveId" clId="{CF1FAA12-072C-4ED5-BA76-0FFFAEFDB88A}" dt="2026-01-31T22:49:50.992" v="271" actId="47"/>
-        <pc:sldMkLst>
-          <pc:docMk/>
-          <pc:sldMk cId="0" sldId="301"/>
-        </pc:sldMkLst>
-        <pc:spChg chg="mod">
-          <ac:chgData name="Zonghua Gu" userId="9a7e1853e1951ef5" providerId="LiveId" clId="{CF1FAA12-072C-4ED5-BA76-0FFFAEFDB88A}" dt="2026-01-31T14:23:42.081" v="231" actId="20577"/>
-          <ac:spMkLst>
-            <pc:docMk/>
-            <pc:sldMk cId="0" sldId="301"/>
-            <ac:spMk id="893" creationId="{00000000-0000-0000-0000-000000000000}"/>
-          </ac:spMkLst>
-        </pc:spChg>
-      </pc:sldChg>
-      <pc:sldChg chg="del">
-        <pc:chgData name="Zonghua Gu" userId="9a7e1853e1951ef5" providerId="LiveId" clId="{CF1FAA12-072C-4ED5-BA76-0FFFAEFDB88A}" dt="2026-01-31T22:49:50.992" v="271" actId="47"/>
-        <pc:sldMkLst>
-          <pc:docMk/>
-          <pc:sldMk cId="0" sldId="302"/>
-        </pc:sldMkLst>
-      </pc:sldChg>
-      <pc:sldChg chg="del">
-        <pc:chgData name="Zonghua Gu" userId="9a7e1853e1951ef5" providerId="LiveId" clId="{CF1FAA12-072C-4ED5-BA76-0FFFAEFDB88A}" dt="2026-01-31T22:49:50.992" v="271" actId="47"/>
-        <pc:sldMkLst>
-          <pc:docMk/>
-          <pc:sldMk cId="0" sldId="303"/>
-        </pc:sldMkLst>
-      </pc:sldChg>
-      <pc:sldChg chg="modSp del mod">
-        <pc:chgData name="Zonghua Gu" userId="9a7e1853e1951ef5" providerId="LiveId" clId="{CF1FAA12-072C-4ED5-BA76-0FFFAEFDB88A}" dt="2026-01-31T22:49:50.992" v="271" actId="47"/>
-        <pc:sldMkLst>
-          <pc:docMk/>
-          <pc:sldMk cId="0" sldId="304"/>
-        </pc:sldMkLst>
-        <pc:spChg chg="mod">
-          <ac:chgData name="Zonghua Gu" userId="9a7e1853e1951ef5" providerId="LiveId" clId="{CF1FAA12-072C-4ED5-BA76-0FFFAEFDB88A}" dt="2026-01-31T14:25:23.520" v="232" actId="207"/>
-          <ac:spMkLst>
-            <pc:docMk/>
-            <pc:sldMk cId="0" sldId="304"/>
-            <ac:spMk id="930" creationId="{00000000-0000-0000-0000-000000000000}"/>
-          </ac:spMkLst>
-        </pc:spChg>
-      </pc:sldChg>
-      <pc:sldChg chg="del">
-        <pc:chgData name="Zonghua Gu" userId="9a7e1853e1951ef5" providerId="LiveId" clId="{CF1FAA12-072C-4ED5-BA76-0FFFAEFDB88A}" dt="2026-01-31T22:49:50.992" v="271" actId="47"/>
-        <pc:sldMkLst>
-          <pc:docMk/>
-          <pc:sldMk cId="0" sldId="305"/>
-        </pc:sldMkLst>
-      </pc:sldChg>
-      <pc:sldChg chg="del">
-        <pc:chgData name="Zonghua Gu" userId="9a7e1853e1951ef5" providerId="LiveId" clId="{CF1FAA12-072C-4ED5-BA76-0FFFAEFDB88A}" dt="2026-01-31T22:49:50.992" v="271" actId="47"/>
-        <pc:sldMkLst>
-          <pc:docMk/>
-          <pc:sldMk cId="0" sldId="306"/>
-        </pc:sldMkLst>
-      </pc:sldChg>
-      <pc:sldChg chg="del">
-        <pc:chgData name="Zonghua Gu" userId="9a7e1853e1951ef5" providerId="LiveId" clId="{CF1FAA12-072C-4ED5-BA76-0FFFAEFDB88A}" dt="2026-01-31T22:49:50.992" v="271" actId="47"/>
-        <pc:sldMkLst>
-          <pc:docMk/>
-          <pc:sldMk cId="0" sldId="307"/>
-        </pc:sldMkLst>
-      </pc:sldChg>
-      <pc:sldChg chg="del">
-        <pc:chgData name="Zonghua Gu" userId="9a7e1853e1951ef5" providerId="LiveId" clId="{CF1FAA12-072C-4ED5-BA76-0FFFAEFDB88A}" dt="2026-01-31T22:49:50.992" v="271" actId="47"/>
-        <pc:sldMkLst>
-          <pc:docMk/>
-          <pc:sldMk cId="0" sldId="308"/>
-        </pc:sldMkLst>
-      </pc:sldChg>
-      <pc:sldChg chg="del">
-        <pc:chgData name="Zonghua Gu" userId="9a7e1853e1951ef5" providerId="LiveId" clId="{CF1FAA12-072C-4ED5-BA76-0FFFAEFDB88A}" dt="2026-01-31T22:49:50.992" v="271" actId="47"/>
-        <pc:sldMkLst>
-          <pc:docMk/>
-          <pc:sldMk cId="0" sldId="309"/>
-        </pc:sldMkLst>
-      </pc:sldChg>
-      <pc:sldChg chg="del">
-        <pc:chgData name="Zonghua Gu" userId="9a7e1853e1951ef5" providerId="LiveId" clId="{CF1FAA12-072C-4ED5-BA76-0FFFAEFDB88A}" dt="2026-01-31T22:49:50.992" v="271" actId="47"/>
-        <pc:sldMkLst>
-          <pc:docMk/>
-          <pc:sldMk cId="0" sldId="310"/>
-        </pc:sldMkLst>
-      </pc:sldChg>
-      <pc:sldChg chg="del">
-        <pc:chgData name="Zonghua Gu" userId="9a7e1853e1951ef5" providerId="LiveId" clId="{CF1FAA12-072C-4ED5-BA76-0FFFAEFDB88A}" dt="2026-01-31T22:49:50.992" v="271" actId="47"/>
-        <pc:sldMkLst>
-          <pc:docMk/>
-          <pc:sldMk cId="0" sldId="311"/>
-        </pc:sldMkLst>
-      </pc:sldChg>
-      <pc:sldChg chg="del">
-        <pc:chgData name="Zonghua Gu" userId="9a7e1853e1951ef5" providerId="LiveId" clId="{CF1FAA12-072C-4ED5-BA76-0FFFAEFDB88A}" dt="2026-01-31T22:49:50.992" v="271" actId="47"/>
-        <pc:sldMkLst>
-          <pc:docMk/>
-          <pc:sldMk cId="0" sldId="312"/>
-        </pc:sldMkLst>
-      </pc:sldChg>
-      <pc:sldChg chg="modSp del modNotes">
-        <pc:chgData name="Zonghua Gu" userId="9a7e1853e1951ef5" providerId="LiveId" clId="{CF1FAA12-072C-4ED5-BA76-0FFFAEFDB88A}" dt="2026-01-31T22:49:50.992" v="271" actId="47"/>
-        <pc:sldMkLst>
-          <pc:docMk/>
-          <pc:sldMk cId="0" sldId="313"/>
-        </pc:sldMkLst>
-        <pc:spChg chg="mod">
-          <ac:chgData name="Zonghua Gu" userId="9a7e1853e1951ef5" providerId="LiveId" clId="{CF1FAA12-072C-4ED5-BA76-0FFFAEFDB88A}" dt="2026-01-31T14:13:13.659" v="199"/>
-          <ac:spMkLst>
-            <pc:docMk/>
-            <pc:sldMk cId="0" sldId="313"/>
-            <ac:spMk id="1095" creationId="{00000000-0000-0000-0000-000000000000}"/>
-          </ac:spMkLst>
-        </pc:spChg>
-      </pc:sldChg>
-      <pc:sldChg chg="del">
-        <pc:chgData name="Zonghua Gu" userId="9a7e1853e1951ef5" providerId="LiveId" clId="{CF1FAA12-072C-4ED5-BA76-0FFFAEFDB88A}" dt="2026-01-31T22:49:50.992" v="271" actId="47"/>
-        <pc:sldMkLst>
-          <pc:docMk/>
-          <pc:sldMk cId="0" sldId="314"/>
-        </pc:sldMkLst>
-      </pc:sldChg>
-      <pc:sldChg chg="modSp del mod">
-        <pc:chgData name="Zonghua Gu" userId="9a7e1853e1951ef5" providerId="LiveId" clId="{CF1FAA12-072C-4ED5-BA76-0FFFAEFDB88A}" dt="2026-01-31T22:49:50.992" v="271" actId="47"/>
-        <pc:sldMkLst>
-          <pc:docMk/>
-          <pc:sldMk cId="0" sldId="315"/>
-        </pc:sldMkLst>
-        <pc:graphicFrameChg chg="modGraphic">
-          <ac:chgData name="Zonghua Gu" userId="9a7e1853e1951ef5" providerId="LiveId" clId="{CF1FAA12-072C-4ED5-BA76-0FFFAEFDB88A}" dt="2026-01-31T14:29:21.886" v="237" actId="113"/>
-          <ac:graphicFrameMkLst>
-            <pc:docMk/>
-            <pc:sldMk cId="0" sldId="315"/>
-            <ac:graphicFrameMk id="1108" creationId="{00000000-0000-0000-0000-000000000000}"/>
-          </ac:graphicFrameMkLst>
-        </pc:graphicFrameChg>
-        <pc:graphicFrameChg chg="modGraphic">
-          <ac:chgData name="Zonghua Gu" userId="9a7e1853e1951ef5" providerId="LiveId" clId="{CF1FAA12-072C-4ED5-BA76-0FFFAEFDB88A}" dt="2026-01-31T14:29:25.100" v="238" actId="113"/>
-          <ac:graphicFrameMkLst>
-            <pc:docMk/>
-            <pc:sldMk cId="0" sldId="315"/>
-            <ac:graphicFrameMk id="1109" creationId="{00000000-0000-0000-0000-000000000000}"/>
-          </ac:graphicFrameMkLst>
-        </pc:graphicFrameChg>
-      </pc:sldChg>
-      <pc:sldChg chg="del">
-        <pc:chgData name="Zonghua Gu" userId="9a7e1853e1951ef5" providerId="LiveId" clId="{CF1FAA12-072C-4ED5-BA76-0FFFAEFDB88A}" dt="2026-01-31T22:49:50.992" v="271" actId="47"/>
-        <pc:sldMkLst>
-          <pc:docMk/>
-          <pc:sldMk cId="0" sldId="316"/>
-        </pc:sldMkLst>
-      </pc:sldChg>
-      <pc:sldChg chg="del">
-        <pc:chgData name="Zonghua Gu" userId="9a7e1853e1951ef5" providerId="LiveId" clId="{CF1FAA12-072C-4ED5-BA76-0FFFAEFDB88A}" dt="2026-01-31T22:49:50.992" v="271" actId="47"/>
-        <pc:sldMkLst>
-          <pc:docMk/>
-          <pc:sldMk cId="0" sldId="317"/>
-        </pc:sldMkLst>
-      </pc:sldChg>
-      <pc:sldChg chg="del">
-        <pc:chgData name="Zonghua Gu" userId="9a7e1853e1951ef5" providerId="LiveId" clId="{CF1FAA12-072C-4ED5-BA76-0FFFAEFDB88A}" dt="2026-01-31T22:49:50.992" v="271" actId="47"/>
-        <pc:sldMkLst>
-          <pc:docMk/>
-          <pc:sldMk cId="0" sldId="318"/>
-        </pc:sldMkLst>
-      </pc:sldChg>
-      <pc:sldChg chg="addSp modSp del modNotes">
-        <pc:chgData name="Zonghua Gu" userId="9a7e1853e1951ef5" providerId="LiveId" clId="{CF1FAA12-072C-4ED5-BA76-0FFFAEFDB88A}" dt="2026-01-31T22:49:50.992" v="271" actId="47"/>
-        <pc:sldMkLst>
-          <pc:docMk/>
-          <pc:sldMk cId="0" sldId="319"/>
-        </pc:sldMkLst>
-        <pc:cxnChg chg="add mod">
-          <ac:chgData name="Zonghua Gu" userId="9a7e1853e1951ef5" providerId="LiveId" clId="{CF1FAA12-072C-4ED5-BA76-0FFFAEFDB88A}" dt="2026-01-31T14:32:37.119" v="239" actId="571"/>
-          <ac:cxnSpMkLst>
-            <pc:docMk/>
-            <pc:sldMk cId="0" sldId="319"/>
-            <ac:cxnSpMk id="2" creationId="{4F63C1DA-05EC-920E-A19E-D3AE9B174429}"/>
-          </ac:cxnSpMkLst>
-        </pc:cxnChg>
-      </pc:sldChg>
-      <pc:sldChg chg="del">
-        <pc:chgData name="Zonghua Gu" userId="9a7e1853e1951ef5" providerId="LiveId" clId="{CF1FAA12-072C-4ED5-BA76-0FFFAEFDB88A}" dt="2026-01-31T22:49:50.992" v="271" actId="47"/>
-        <pc:sldMkLst>
-          <pc:docMk/>
-          <pc:sldMk cId="0" sldId="320"/>
-        </pc:sldMkLst>
-      </pc:sldChg>
-      <pc:sldMasterChg chg="addSldLayout delSldLayout">
-        <pc:chgData name="Zonghua Gu" userId="9a7e1853e1951ef5" providerId="LiveId" clId="{CF1FAA12-072C-4ED5-BA76-0FFFAEFDB88A}" dt="2026-01-31T23:33:55.821" v="313" actId="47"/>
-        <pc:sldMasterMkLst>
-          <pc:docMk/>
-          <pc:sldMasterMk cId="0" sldId="2147483670"/>
-        </pc:sldMasterMkLst>
-        <pc:sldLayoutChg chg="add del">
-          <pc:chgData name="Zonghua Gu" userId="9a7e1853e1951ef5" providerId="LiveId" clId="{CF1FAA12-072C-4ED5-BA76-0FFFAEFDB88A}" dt="2026-01-31T22:48:34.872" v="253" actId="47"/>
-          <pc:sldLayoutMkLst>
-            <pc:docMk/>
-            <pc:sldMasterMk cId="0" sldId="2147483670"/>
-            <pc:sldLayoutMk cId="0" sldId="2147483648"/>
-          </pc:sldLayoutMkLst>
-        </pc:sldLayoutChg>
-        <pc:sldLayoutChg chg="del">
-          <pc:chgData name="Zonghua Gu" userId="9a7e1853e1951ef5" providerId="LiveId" clId="{CF1FAA12-072C-4ED5-BA76-0FFFAEFDB88A}" dt="2026-01-31T23:33:55.821" v="313" actId="47"/>
-          <pc:sldLayoutMkLst>
-            <pc:docMk/>
-            <pc:sldMasterMk cId="0" sldId="2147483670"/>
-            <pc:sldLayoutMk cId="0" sldId="2147483649"/>
-          </pc:sldLayoutMkLst>
-        </pc:sldLayoutChg>
-        <pc:sldLayoutChg chg="del">
-          <pc:chgData name="Zonghua Gu" userId="9a7e1853e1951ef5" providerId="LiveId" clId="{CF1FAA12-072C-4ED5-BA76-0FFFAEFDB88A}" dt="2026-01-31T22:49:50.992" v="271" actId="47"/>
-          <pc:sldLayoutMkLst>
-            <pc:docMk/>
-            <pc:sldMasterMk cId="0" sldId="2147483670"/>
-            <pc:sldLayoutMk cId="0" sldId="2147483650"/>
-          </pc:sldLayoutMkLst>
-        </pc:sldLayoutChg>
-        <pc:sldLayoutChg chg="del">
-          <pc:chgData name="Zonghua Gu" userId="9a7e1853e1951ef5" providerId="LiveId" clId="{CF1FAA12-072C-4ED5-BA76-0FFFAEFDB88A}" dt="2026-01-31T22:49:50.992" v="271" actId="47"/>
-          <pc:sldLayoutMkLst>
-            <pc:docMk/>
-            <pc:sldMasterMk cId="0" sldId="2147483670"/>
-            <pc:sldLayoutMk cId="0" sldId="2147483651"/>
-          </pc:sldLayoutMkLst>
-        </pc:sldLayoutChg>
-        <pc:sldLayoutChg chg="del">
-          <pc:chgData name="Zonghua Gu" userId="9a7e1853e1951ef5" providerId="LiveId" clId="{CF1FAA12-072C-4ED5-BA76-0FFFAEFDB88A}" dt="2026-01-31T22:49:50.992" v="271" actId="47"/>
-          <pc:sldLayoutMkLst>
-            <pc:docMk/>
-            <pc:sldMasterMk cId="0" sldId="2147483670"/>
-            <pc:sldLayoutMk cId="0" sldId="2147483657"/>
-          </pc:sldLayoutMkLst>
-        </pc:sldLayoutChg>
-      </pc:sldMasterChg>
     </pc:docChg>
   </pc:docChgLst>
 </pc:chgInfo>
@@ -16557,7 +15326,7 @@
         </p:nvSpPr>
         <p:spPr>
           <a:xfrm>
-            <a:off x="2490438" y="3519633"/>
+            <a:off x="1747067" y="4729212"/>
             <a:ext cx="795411" cy="261610"/>
           </a:xfrm>
           <a:prstGeom prst="rect">
@@ -16610,6 +15379,42 @@
             <a:r>
               <a:rPr lang="en-US" altLang="zh-CN" sz="1100" dirty="0"/>
               <a:t>Peer</a:t>
+            </a:r>
+            <a:endParaRPr lang="zh-CN" altLang="en-US" sz="1100" dirty="0"/>
+          </a:p>
+        </p:txBody>
+      </p:sp>
+      <p:sp>
+        <p:nvSpPr>
+          <p:cNvPr id="6" name="TextBox 5">
+            <a:extLst>
+              <a:ext uri="{FF2B5EF4-FFF2-40B4-BE49-F238E27FC236}">
+                <a16:creationId xmlns:a16="http://schemas.microsoft.com/office/drawing/2014/main" id="{7C6E464A-5322-C93E-0A45-DF2222AC0560}"/>
+              </a:ext>
+            </a:extLst>
+          </p:cNvPr>
+          <p:cNvSpPr txBox="1"/>
+          <p:nvPr/>
+        </p:nvSpPr>
+        <p:spPr>
+          <a:xfrm>
+            <a:off x="2656482" y="2743564"/>
+            <a:ext cx="710451" cy="261610"/>
+          </a:xfrm>
+          <a:prstGeom prst="rect">
+            <a:avLst/>
+          </a:prstGeom>
+          <a:noFill/>
+        </p:spPr>
+        <p:txBody>
+          <a:bodyPr wrap="none" rtlCol="0">
+            <a:spAutoFit/>
+          </a:bodyPr>
+          <a:lstStyle/>
+          <a:p>
+            <a:r>
+              <a:rPr lang="en-US" altLang="zh-CN" sz="1100" dirty="0"/>
+              <a:t>Provider</a:t>
             </a:r>
             <a:endParaRPr lang="zh-CN" altLang="en-US" sz="1100" dirty="0"/>
           </a:p>
@@ -16668,7 +15473,7 @@
           <a:p>
             <a:r>
               <a:rPr lang="en-US" altLang="zh-CN" dirty="0"/>
-              <a:t>Explanations</a:t>
+              <a:t>Explanations (based on Gao-Rexford Rules)</a:t>
             </a:r>
             <a:endParaRPr lang="zh-CN" altLang="en-US" dirty="0"/>
           </a:p>
@@ -16692,7 +15497,7 @@
         </p:nvSpPr>
         <p:spPr>
           <a:xfrm>
-            <a:off x="107051" y="402200"/>
+            <a:off x="0" y="306450"/>
             <a:ext cx="4880586" cy="4530600"/>
           </a:xfrm>
         </p:spPr>
@@ -16709,14 +15514,7 @@
             <a:pPr lvl="1"/>
             <a:r>
               <a:rPr lang="en-US" altLang="zh-CN" sz="1100" dirty="0"/>
-              <a:t>AS4 has a customer neighbor (AS2 will accept)</a:t>
-            </a:r>
-          </a:p>
-          <a:p>
-            <a:pPr lvl="1"/>
-            <a:r>
-              <a:rPr lang="en-US" altLang="zh-CN" sz="1100" dirty="0"/>
-              <a:t>AS2 has a peer neighbor (AS3) AND a customer neighbor (AS5 paying AS3)</a:t>
+              <a:t>AS2 has a peer neighbor (AS3) AND a customer neighbor (AS4)</a:t>
             </a:r>
           </a:p>
           <a:p>
@@ -16758,7 +15556,31 @@
             <a:pPr lvl="1"/>
             <a:r>
               <a:rPr lang="en-US" altLang="zh-CN" sz="1100" dirty="0"/>
-              <a:t>Export rule: Routes from peers are only advertised to customers (not to providers)</a:t>
+              <a:t>Export rule: </a:t>
+            </a:r>
+            <a:r>
+              <a:rPr lang="en-US" altLang="zh-CN" sz="1100" dirty="0">
+                <a:solidFill>
+                  <a:srgbClr val="FF0000"/>
+                </a:solidFill>
+              </a:rPr>
+              <a:t>Routes from peers are only advertised</a:t>
+            </a:r>
+            <a:r>
+              <a:rPr lang="en-US" altLang="zh-CN" sz="1100">
+                <a:solidFill>
+                  <a:srgbClr val="FF0000"/>
+                </a:solidFill>
+              </a:rPr>
+              <a:t>/exported </a:t>
+            </a:r>
+            <a:r>
+              <a:rPr lang="en-US" altLang="zh-CN" sz="1100" dirty="0">
+                <a:solidFill>
+                  <a:srgbClr val="FF0000"/>
+                </a:solidFill>
+              </a:rPr>
+              <a:t>to customers (not to providers)</a:t>
             </a:r>
           </a:p>
           <a:p>
@@ -16772,16 +15594,8 @@
             <a:pPr lvl="1"/>
             <a:r>
               <a:rPr lang="en-US" altLang="zh-CN" sz="1100" dirty="0"/>
-              <a:t>So AS1 can only reach AS5 via AS7 (its peer) and then AS8→AS5</a:t>
-            </a:r>
-          </a:p>
-          <a:p>
-            <a:pPr lvl="1"/>
-            <a:r>
-              <a:rPr lang="en-US" altLang="zh-CN" sz="1100" dirty="0"/>
-              <a:t>This forces the long path through Tier 1 providers </a:t>
-            </a:r>
-            <a:endParaRPr lang="zh-CN" altLang="en-US" sz="1100" dirty="0"/>
+              <a:t>So AS1 can only reach AS5 via AS7 (its peer) and then AS8→AS5. This forces the long path through Tier 1 providers</a:t>
+            </a:r>
           </a:p>
         </p:txBody>
       </p:sp>
@@ -16905,6 +15719,455 @@
   <p:cSld>
     <p:spTree>
       <p:nvGrpSpPr>
+        <p:cNvPr id="1" name=""/>
+        <p:cNvGrpSpPr/>
+        <p:nvPr/>
+      </p:nvGrpSpPr>
+      <p:grpSpPr>
+        <a:xfrm>
+          <a:off x="0" y="0"/>
+          <a:ext cx="0" cy="0"/>
+          <a:chOff x="0" y="0"/>
+          <a:chExt cx="0" cy="0"/>
+        </a:xfrm>
+      </p:grpSpPr>
+      <p:sp>
+        <p:nvSpPr>
+          <p:cNvPr id="2" name="Title 1">
+            <a:extLst>
+              <a:ext uri="{FF2B5EF4-FFF2-40B4-BE49-F238E27FC236}">
+                <a16:creationId xmlns:a16="http://schemas.microsoft.com/office/drawing/2014/main" id="{B115100A-DFFF-500F-E553-C1CA2F507822}"/>
+              </a:ext>
+            </a:extLst>
+          </p:cNvPr>
+          <p:cNvSpPr>
+            <a:spLocks noGrp="1"/>
+          </p:cNvSpPr>
+          <p:nvPr>
+            <p:ph type="title"/>
+          </p:nvPr>
+        </p:nvSpPr>
+        <p:spPr/>
+        <p:txBody>
+          <a:bodyPr/>
+          <a:lstStyle/>
+          <a:p>
+            <a:r>
+              <a:rPr lang="en-US" altLang="zh-CN" dirty="0"/>
+              <a:t>Explanations (based on Gao-Rexford Rules)</a:t>
+            </a:r>
+            <a:endParaRPr lang="en-US" dirty="0"/>
+          </a:p>
+        </p:txBody>
+      </p:sp>
+      <p:sp>
+        <p:nvSpPr>
+          <p:cNvPr id="3" name="Text Placeholder 2">
+            <a:extLst>
+              <a:ext uri="{FF2B5EF4-FFF2-40B4-BE49-F238E27FC236}">
+                <a16:creationId xmlns:a16="http://schemas.microsoft.com/office/drawing/2014/main" id="{F5EA2728-D512-2120-FCEF-07325C84B194}"/>
+              </a:ext>
+            </a:extLst>
+          </p:cNvPr>
+          <p:cNvSpPr>
+            <a:spLocks noGrp="1"/>
+          </p:cNvSpPr>
+          <p:nvPr>
+            <p:ph type="body" idx="1"/>
+          </p:nvPr>
+        </p:nvSpPr>
+        <p:spPr>
+          <a:xfrm>
+            <a:off x="107050" y="402200"/>
+            <a:ext cx="4918433" cy="4682756"/>
+          </a:xfrm>
+        </p:spPr>
+        <p:txBody>
+          <a:bodyPr>
+            <a:normAutofit fontScale="92500" lnSpcReduction="10000"/>
+          </a:bodyPr>
+          <a:lstStyle/>
+          <a:p>
+            <a:r>
+              <a:rPr lang="en-US" altLang="zh-CN" sz="1100" dirty="0"/>
+              <a:t>How about AS6 → AS9 → AS8 → AS5? </a:t>
+            </a:r>
+            <a:endParaRPr lang="en-US" sz="1100" dirty="0"/>
+          </a:p>
+          <a:p>
+            <a:r>
+              <a:rPr lang="en-US" sz="1100" dirty="0"/>
+              <a:t>AS9 is a </a:t>
+            </a:r>
+            <a:r>
+              <a:rPr lang="en-US" sz="1100" b="1" dirty="0"/>
+              <a:t>customer</a:t>
+            </a:r>
+            <a:r>
+              <a:rPr lang="en-US" sz="1100" dirty="0"/>
+              <a:t> of AS8, and AS5 is also a </a:t>
+            </a:r>
+            <a:r>
+              <a:rPr lang="en-US" sz="1100" b="1" dirty="0"/>
+              <a:t>customer</a:t>
+            </a:r>
+            <a:r>
+              <a:rPr lang="en-US" sz="1100" dirty="0"/>
+              <a:t> of AS8. So:</a:t>
+            </a:r>
+          </a:p>
+          <a:p>
+            <a:r>
+              <a:rPr lang="en-US" sz="1100" b="1" dirty="0"/>
+              <a:t>AS5 → AS8</a:t>
+            </a:r>
+            <a:r>
+              <a:rPr lang="en-US" sz="1100" dirty="0"/>
+              <a:t> is customer to provider for route origination </a:t>
+            </a:r>
+          </a:p>
+          <a:p>
+            <a:r>
+              <a:rPr lang="en-US" sz="1100" b="1" dirty="0"/>
+              <a:t>AS8 → AS9</a:t>
+            </a:r>
+            <a:r>
+              <a:rPr lang="en-US" sz="1100" dirty="0"/>
+              <a:t> is provider to customer advertisement </a:t>
+            </a:r>
+          </a:p>
+          <a:p>
+            <a:r>
+              <a:rPr lang="en-US" sz="1100" b="1" dirty="0"/>
+              <a:t>AS9 learns the AS5 route from its provider AS8</a:t>
+            </a:r>
+            <a:r>
+              <a:rPr lang="en-US" sz="1100" dirty="0"/>
+              <a:t> </a:t>
+            </a:r>
+          </a:p>
+          <a:p>
+            <a:r>
+              <a:rPr lang="en-US" sz="1100" dirty="0"/>
+              <a:t>Now the key export rule applies: </a:t>
+            </a:r>
+            <a:r>
+              <a:rPr lang="en-US" sz="1100" dirty="0">
+                <a:solidFill>
+                  <a:srgbClr val="FF0000"/>
+                </a:solidFill>
+              </a:rPr>
+              <a:t>Routes learned from a </a:t>
+            </a:r>
+            <a:r>
+              <a:rPr lang="en-US" sz="1100" b="1" dirty="0">
+                <a:solidFill>
+                  <a:srgbClr val="FF0000"/>
+                </a:solidFill>
+              </a:rPr>
+              <a:t>provider</a:t>
+            </a:r>
+            <a:r>
+              <a:rPr lang="en-US" sz="1100" dirty="0">
+                <a:solidFill>
+                  <a:srgbClr val="FF0000"/>
+                </a:solidFill>
+              </a:rPr>
+              <a:t> or </a:t>
+            </a:r>
+            <a:r>
+              <a:rPr lang="en-US" sz="1100" b="1" dirty="0">
+                <a:solidFill>
+                  <a:srgbClr val="FF0000"/>
+                </a:solidFill>
+              </a:rPr>
+              <a:t>peer</a:t>
+            </a:r>
+            <a:r>
+              <a:rPr lang="en-US" sz="1100" dirty="0">
+                <a:solidFill>
+                  <a:srgbClr val="FF0000"/>
+                </a:solidFill>
+              </a:rPr>
+              <a:t> are exported </a:t>
+            </a:r>
+            <a:r>
+              <a:rPr lang="en-US" sz="1100" b="1" dirty="0">
+                <a:solidFill>
+                  <a:srgbClr val="FF0000"/>
+                </a:solidFill>
+              </a:rPr>
+              <a:t>only to customers</a:t>
+            </a:r>
+            <a:r>
+              <a:rPr lang="en-US" sz="1100" dirty="0">
+                <a:solidFill>
+                  <a:srgbClr val="FF0000"/>
+                </a:solidFill>
+              </a:rPr>
+              <a:t> </a:t>
+            </a:r>
+          </a:p>
+          <a:p>
+            <a:pPr lvl="1"/>
+            <a:r>
+              <a:rPr lang="en-US" sz="1100" dirty="0"/>
+              <a:t>AS9 learned the route to AS5 from </a:t>
+            </a:r>
+            <a:r>
+              <a:rPr lang="en-US" sz="1100" b="1" dirty="0"/>
+              <a:t>provider AS8, </a:t>
+            </a:r>
+            <a:r>
+              <a:rPr lang="en-US" sz="1100" dirty="0"/>
+              <a:t>therefore AS9 </a:t>
+            </a:r>
+            <a:r>
+              <a:rPr lang="en-US" sz="1100" b="1" dirty="0"/>
+              <a:t>cannot advertise that route to peer AS6. </a:t>
+            </a:r>
+            <a:r>
+              <a:rPr lang="en-US" sz="1100" dirty="0"/>
+              <a:t>So AS6 does </a:t>
+            </a:r>
+            <a:r>
+              <a:rPr lang="en-US" sz="1100" b="1" dirty="0"/>
+              <a:t>not</a:t>
+            </a:r>
+            <a:r>
+              <a:rPr lang="en-US" sz="1100" dirty="0"/>
+              <a:t> learn the AS6 → AS9 → AS8 → AS5 path.</a:t>
+            </a:r>
+          </a:p>
+          <a:p>
+            <a:r>
+              <a:rPr lang="en-US" sz="1100" dirty="0"/>
+              <a:t>The valley-free view says the same thing:</a:t>
+            </a:r>
+          </a:p>
+          <a:p>
+            <a:r>
+              <a:rPr lang="en-US" sz="1100" b="1" dirty="0"/>
+              <a:t>AS6 → AS9</a:t>
+            </a:r>
+            <a:r>
+              <a:rPr lang="en-US" sz="1100" dirty="0"/>
+              <a:t> = peer. </a:t>
+            </a:r>
+            <a:r>
+              <a:rPr lang="en-US" sz="1100" b="1" dirty="0"/>
+              <a:t>AS9 → AS8</a:t>
+            </a:r>
+            <a:r>
+              <a:rPr lang="en-US" sz="1100" dirty="0"/>
+              <a:t> = up. </a:t>
+            </a:r>
+            <a:r>
+              <a:rPr lang="en-US" sz="1100" b="1" dirty="0"/>
+              <a:t>AS8 → AS5</a:t>
+            </a:r>
+            <a:r>
+              <a:rPr lang="en-US" sz="1100" dirty="0"/>
+              <a:t> = down </a:t>
+            </a:r>
+          </a:p>
+          <a:p>
+            <a:r>
+              <a:rPr lang="en-US" sz="1100" dirty="0"/>
+              <a:t>That is </a:t>
+            </a:r>
+            <a:r>
+              <a:rPr lang="en-US" sz="1100" b="1" dirty="0"/>
+              <a:t>peer, then up, then down</a:t>
+            </a:r>
+            <a:r>
+              <a:rPr lang="en-US" sz="1100" dirty="0"/>
+              <a:t>, which is not valley-free. In Gao–Rexford, the allowed pattern is:</a:t>
+            </a:r>
+          </a:p>
+          <a:p>
+            <a:pPr lvl="1"/>
+            <a:r>
+              <a:rPr lang="en-US" sz="1100" dirty="0"/>
+              <a:t>zero or more </a:t>
+            </a:r>
+            <a:r>
+              <a:rPr lang="en-US" sz="1100" b="1" dirty="0"/>
+              <a:t>up</a:t>
+            </a:r>
+            <a:r>
+              <a:rPr lang="en-US" sz="1100" dirty="0"/>
+              <a:t> edges, </a:t>
+            </a:r>
+          </a:p>
+          <a:p>
+            <a:pPr lvl="1"/>
+            <a:r>
+              <a:rPr lang="en-US" sz="1100" dirty="0"/>
+              <a:t>then at most one </a:t>
+            </a:r>
+            <a:r>
+              <a:rPr lang="en-US" sz="1100" b="1" dirty="0"/>
+              <a:t>peer</a:t>
+            </a:r>
+            <a:r>
+              <a:rPr lang="en-US" sz="1100" dirty="0"/>
+              <a:t> edge, </a:t>
+            </a:r>
+          </a:p>
+          <a:p>
+            <a:pPr lvl="1"/>
+            <a:r>
+              <a:rPr lang="en-US" sz="1100" dirty="0"/>
+              <a:t>then zero or more </a:t>
+            </a:r>
+            <a:r>
+              <a:rPr lang="en-US" sz="1100" b="1" dirty="0"/>
+              <a:t>down</a:t>
+            </a:r>
+            <a:r>
+              <a:rPr lang="en-US" sz="1100" dirty="0"/>
+              <a:t> edges. </a:t>
+            </a:r>
+          </a:p>
+          <a:p>
+            <a:r>
+              <a:rPr lang="en-US" sz="1100" dirty="0"/>
+              <a:t>So this path violates the rule. </a:t>
+            </a:r>
+          </a:p>
+          <a:p>
+            <a:r>
+              <a:rPr lang="en-US" sz="1100" b="1" dirty="0"/>
+              <a:t>AS6 → AS9 → AS8 → AS5 is invalid because AS9 learns the route from a provider and cannot export it to its peer AS6.</a:t>
+            </a:r>
+            <a:endParaRPr lang="en-US" sz="1100" dirty="0"/>
+          </a:p>
+          <a:p>
+            <a:endParaRPr lang="en-US" sz="1100" dirty="0"/>
+          </a:p>
+        </p:txBody>
+      </p:sp>
+      <p:pic>
+        <p:nvPicPr>
+          <p:cNvPr id="4" name="Picture 3">
+            <a:extLst>
+              <a:ext uri="{FF2B5EF4-FFF2-40B4-BE49-F238E27FC236}">
+                <a16:creationId xmlns:a16="http://schemas.microsoft.com/office/drawing/2014/main" id="{ADDDA921-A51A-2003-DE2F-9AFEA87A8FEA}"/>
+              </a:ext>
+            </a:extLst>
+          </p:cNvPr>
+          <p:cNvPicPr>
+            <a:picLocks noChangeAspect="1"/>
+          </p:cNvPicPr>
+          <p:nvPr/>
+        </p:nvPicPr>
+        <p:blipFill>
+          <a:blip r:embed="rId2"/>
+          <a:stretch>
+            <a:fillRect/>
+          </a:stretch>
+        </p:blipFill>
+        <p:spPr>
+          <a:xfrm>
+            <a:off x="4873227" y="1548938"/>
+            <a:ext cx="4270773" cy="2394982"/>
+          </a:xfrm>
+          <a:prstGeom prst="rect">
+            <a:avLst/>
+          </a:prstGeom>
+        </p:spPr>
+      </p:pic>
+      <p:sp>
+        <p:nvSpPr>
+          <p:cNvPr id="5" name="TextBox 4">
+            <a:extLst>
+              <a:ext uri="{FF2B5EF4-FFF2-40B4-BE49-F238E27FC236}">
+                <a16:creationId xmlns:a16="http://schemas.microsoft.com/office/drawing/2014/main" id="{2962E189-AE68-2144-6922-8C82685A7224}"/>
+              </a:ext>
+            </a:extLst>
+          </p:cNvPr>
+          <p:cNvSpPr txBox="1"/>
+          <p:nvPr/>
+        </p:nvSpPr>
+        <p:spPr>
+          <a:xfrm>
+            <a:off x="4873227" y="2425124"/>
+            <a:ext cx="795411" cy="261610"/>
+          </a:xfrm>
+          <a:prstGeom prst="rect">
+            <a:avLst/>
+          </a:prstGeom>
+          <a:noFill/>
+        </p:spPr>
+        <p:txBody>
+          <a:bodyPr wrap="none" rtlCol="0">
+            <a:spAutoFit/>
+          </a:bodyPr>
+          <a:lstStyle/>
+          <a:p>
+            <a:r>
+              <a:rPr lang="en-US" altLang="zh-CN" sz="1100" dirty="0"/>
+              <a:t>Customer</a:t>
+            </a:r>
+            <a:endParaRPr lang="zh-CN" altLang="en-US" sz="1100" dirty="0"/>
+          </a:p>
+        </p:txBody>
+      </p:sp>
+      <p:sp>
+        <p:nvSpPr>
+          <p:cNvPr id="6" name="TextBox 5">
+            <a:extLst>
+              <a:ext uri="{FF2B5EF4-FFF2-40B4-BE49-F238E27FC236}">
+                <a16:creationId xmlns:a16="http://schemas.microsoft.com/office/drawing/2014/main" id="{C3C2A4D2-CF08-12B1-54DF-57335316933F}"/>
+              </a:ext>
+            </a:extLst>
+          </p:cNvPr>
+          <p:cNvSpPr txBox="1"/>
+          <p:nvPr/>
+        </p:nvSpPr>
+        <p:spPr>
+          <a:xfrm>
+            <a:off x="6750518" y="1680928"/>
+            <a:ext cx="482824" cy="261610"/>
+          </a:xfrm>
+          <a:prstGeom prst="rect">
+            <a:avLst/>
+          </a:prstGeom>
+          <a:noFill/>
+        </p:spPr>
+        <p:txBody>
+          <a:bodyPr wrap="none" rtlCol="0">
+            <a:spAutoFit/>
+          </a:bodyPr>
+          <a:lstStyle/>
+          <a:p>
+            <a:r>
+              <a:rPr lang="en-US" altLang="zh-CN" sz="1100" dirty="0"/>
+              <a:t>Peer</a:t>
+            </a:r>
+            <a:endParaRPr lang="zh-CN" altLang="en-US" sz="1100" dirty="0"/>
+          </a:p>
+        </p:txBody>
+      </p:sp>
+    </p:spTree>
+    <p:extLst>
+      <p:ext uri="{BB962C8B-B14F-4D97-AF65-F5344CB8AC3E}">
+        <p14:creationId xmlns:p14="http://schemas.microsoft.com/office/powerpoint/2010/main" val="2089477044"/>
+      </p:ext>
+    </p:extLst>
+  </p:cSld>
+  <p:clrMapOvr>
+    <a:masterClrMapping/>
+  </p:clrMapOvr>
+</p:sld>
+</file>
+
+<file path=ppt/slides/slide6.xml><?xml version="1.0" encoding="utf-8"?>
+<p:sld xmlns:a="http://schemas.openxmlformats.org/drawingml/2006/main" xmlns:r="http://schemas.openxmlformats.org/officeDocument/2006/relationships" xmlns:p="http://schemas.openxmlformats.org/presentationml/2006/main">
+  <p:cSld>
+    <p:spTree>
+      <p:nvGrpSpPr>
         <p:cNvPr id="1" name="">
           <a:extLst>
             <a:ext uri="{FF2B5EF4-FFF2-40B4-BE49-F238E27FC236}">
@@ -16946,7 +16209,7 @@
           <a:p>
             <a:r>
               <a:rPr lang="en-US" altLang="zh-CN" dirty="0"/>
-              <a:t>Explanations</a:t>
+              <a:t>Explanations (based on Gao-Rexford Rules)</a:t>
             </a:r>
             <a:endParaRPr lang="zh-CN" altLang="en-US" dirty="0"/>
           </a:p>
